--- a/docs/Term Project.pptx
+++ b/docs/Term Project.pptx
@@ -1,30 +1,30 @@
 
 <file path=ppt/presentation.xml><?xml version="1.0" encoding="utf-8"?>
-<p:presentation xmlns:a="http://schemas.openxmlformats.org/drawingml/2006/main" xmlns:r="http://schemas.openxmlformats.org/officeDocument/2006/relationships" xmlns:mc="http://schemas.openxmlformats.org/markup-compatibility/2006" xmlns:mv="urn:schemas-microsoft-com:mac:vml" xmlns:p="http://schemas.openxmlformats.org/presentationml/2006/main" xmlns:c="http://schemas.openxmlformats.org/drawingml/2006/chart" xmlns:dgm="http://schemas.openxmlformats.org/drawingml/2006/diagram" xmlns:o="urn:schemas-microsoft-com:office:office" xmlns:v="urn:schemas-microsoft-com:vml" xmlns:pvml="urn:schemas-microsoft-com:office:powerpoint" xmlns:com="http://schemas.openxmlformats.org/drawingml/2006/compatibility" xmlns:p14="http://schemas.microsoft.com/office/powerpoint/2010/main" xmlns:p15="http://schemas.microsoft.com/office/powerpoint/2012/main" xmlns:ahyp="http://schemas.microsoft.com/office/drawing/2018/hyperlinkcolor" autoCompressPictures="0" embedTrueTypeFonts="1" strictFirstAndLastChars="0" saveSubsetFonts="1">
+<p:presentation xmlns:a="http://schemas.openxmlformats.org/drawingml/2006/main" xmlns:r="http://schemas.openxmlformats.org/officeDocument/2006/relationships" xmlns:p="http://schemas.openxmlformats.org/presentationml/2006/main" strictFirstAndLastChars="0" embedTrueTypeFonts="1" saveSubsetFonts="1" autoCompressPictures="0">
   <p:sldMasterIdLst>
-    <p:sldMasterId id="2147483659" r:id="rId4"/>
+    <p:sldMasterId id="2147483659" r:id="rId1"/>
   </p:sldMasterIdLst>
   <p:notesMasterIdLst>
     <p:notesMasterId r:id="rId5"/>
   </p:notesMasterIdLst>
   <p:sldIdLst>
-    <p:sldId id="256" r:id="rId6"/>
-    <p:sldId id="257" r:id="rId7"/>
-    <p:sldId id="258" r:id="rId8"/>
+    <p:sldId id="256" r:id="rId2"/>
+    <p:sldId id="257" r:id="rId3"/>
+    <p:sldId id="258" r:id="rId4"/>
   </p:sldIdLst>
-  <p:sldSz cy="5143500" cx="9144000"/>
+  <p:sldSz cx="9144000" cy="5143500" type="screen16x9"/>
   <p:notesSz cx="6858000" cy="9144000"/>
   <p:embeddedFontLst>
     <p:embeddedFont>
-      <p:font typeface="Lora"/>
-      <p:regular r:id="rId9"/>
-      <p:bold r:id="rId10"/>
-      <p:italic r:id="rId11"/>
-      <p:boldItalic r:id="rId12"/>
+      <p:font typeface="Lora" panose="020F0502020204030204" pitchFamily="2" charset="0"/>
+      <p:regular r:id="rId6"/>
+      <p:bold r:id="rId7"/>
+      <p:italic r:id="rId8"/>
+      <p:boldItalic r:id="rId9"/>
     </p:embeddedFont>
   </p:embeddedFontLst>
   <p:defaultTextStyle>
-    <a:defPPr lvl="0" marR="0" rtl="0" algn="l">
+    <a:defPPr marR="0" lvl="0" algn="l" rtl="0">
       <a:lnSpc>
         <a:spcPct val="100000"/>
       </a:lnSpc>
@@ -35,7 +35,7 @@
         <a:spcPts val="0"/>
       </a:spcAft>
     </a:defPPr>
-    <a:lvl1pPr lvl="0" marR="0" rtl="0" algn="l">
+    <a:lvl1pPr marR="0" lvl="0" algn="l" rtl="0">
       <a:lnSpc>
         <a:spcPct val="100000"/>
       </a:lnSpc>
@@ -49,7 +49,7 @@
         <a:srgbClr val="000000"/>
       </a:buClr>
       <a:buFont typeface="Arial"/>
-      <a:defRPr b="0" i="0" sz="1400" u="none" cap="none" strike="noStrike">
+      <a:defRPr sz="1400" b="0" i="0" u="none" strike="noStrike" cap="none">
         <a:solidFill>
           <a:srgbClr val="000000"/>
         </a:solidFill>
@@ -59,7 +59,7 @@
         <a:sym typeface="Arial"/>
       </a:defRPr>
     </a:lvl1pPr>
-    <a:lvl2pPr lvl="1" marR="0" rtl="0" algn="l">
+    <a:lvl2pPr marR="0" lvl="1" algn="l" rtl="0">
       <a:lnSpc>
         <a:spcPct val="100000"/>
       </a:lnSpc>
@@ -73,7 +73,7 @@
         <a:srgbClr val="000000"/>
       </a:buClr>
       <a:buFont typeface="Arial"/>
-      <a:defRPr b="0" i="0" sz="1400" u="none" cap="none" strike="noStrike">
+      <a:defRPr sz="1400" b="0" i="0" u="none" strike="noStrike" cap="none">
         <a:solidFill>
           <a:srgbClr val="000000"/>
         </a:solidFill>
@@ -83,7 +83,7 @@
         <a:sym typeface="Arial"/>
       </a:defRPr>
     </a:lvl2pPr>
-    <a:lvl3pPr lvl="2" marR="0" rtl="0" algn="l">
+    <a:lvl3pPr marR="0" lvl="2" algn="l" rtl="0">
       <a:lnSpc>
         <a:spcPct val="100000"/>
       </a:lnSpc>
@@ -97,7 +97,7 @@
         <a:srgbClr val="000000"/>
       </a:buClr>
       <a:buFont typeface="Arial"/>
-      <a:defRPr b="0" i="0" sz="1400" u="none" cap="none" strike="noStrike">
+      <a:defRPr sz="1400" b="0" i="0" u="none" strike="noStrike" cap="none">
         <a:solidFill>
           <a:srgbClr val="000000"/>
         </a:solidFill>
@@ -107,7 +107,7 @@
         <a:sym typeface="Arial"/>
       </a:defRPr>
     </a:lvl3pPr>
-    <a:lvl4pPr lvl="3" marR="0" rtl="0" algn="l">
+    <a:lvl4pPr marR="0" lvl="3" algn="l" rtl="0">
       <a:lnSpc>
         <a:spcPct val="100000"/>
       </a:lnSpc>
@@ -121,7 +121,7 @@
         <a:srgbClr val="000000"/>
       </a:buClr>
       <a:buFont typeface="Arial"/>
-      <a:defRPr b="0" i="0" sz="1400" u="none" cap="none" strike="noStrike">
+      <a:defRPr sz="1400" b="0" i="0" u="none" strike="noStrike" cap="none">
         <a:solidFill>
           <a:srgbClr val="000000"/>
         </a:solidFill>
@@ -131,7 +131,7 @@
         <a:sym typeface="Arial"/>
       </a:defRPr>
     </a:lvl4pPr>
-    <a:lvl5pPr lvl="4" marR="0" rtl="0" algn="l">
+    <a:lvl5pPr marR="0" lvl="4" algn="l" rtl="0">
       <a:lnSpc>
         <a:spcPct val="100000"/>
       </a:lnSpc>
@@ -145,7 +145,7 @@
         <a:srgbClr val="000000"/>
       </a:buClr>
       <a:buFont typeface="Arial"/>
-      <a:defRPr b="0" i="0" sz="1400" u="none" cap="none" strike="noStrike">
+      <a:defRPr sz="1400" b="0" i="0" u="none" strike="noStrike" cap="none">
         <a:solidFill>
           <a:srgbClr val="000000"/>
         </a:solidFill>
@@ -155,7 +155,7 @@
         <a:sym typeface="Arial"/>
       </a:defRPr>
     </a:lvl5pPr>
-    <a:lvl6pPr lvl="5" marR="0" rtl="0" algn="l">
+    <a:lvl6pPr marR="0" lvl="5" algn="l" rtl="0">
       <a:lnSpc>
         <a:spcPct val="100000"/>
       </a:lnSpc>
@@ -169,7 +169,7 @@
         <a:srgbClr val="000000"/>
       </a:buClr>
       <a:buFont typeface="Arial"/>
-      <a:defRPr b="0" i="0" sz="1400" u="none" cap="none" strike="noStrike">
+      <a:defRPr sz="1400" b="0" i="0" u="none" strike="noStrike" cap="none">
         <a:solidFill>
           <a:srgbClr val="000000"/>
         </a:solidFill>
@@ -179,7 +179,7 @@
         <a:sym typeface="Arial"/>
       </a:defRPr>
     </a:lvl6pPr>
-    <a:lvl7pPr lvl="6" marR="0" rtl="0" algn="l">
+    <a:lvl7pPr marR="0" lvl="6" algn="l" rtl="0">
       <a:lnSpc>
         <a:spcPct val="100000"/>
       </a:lnSpc>
@@ -193,7 +193,7 @@
         <a:srgbClr val="000000"/>
       </a:buClr>
       <a:buFont typeface="Arial"/>
-      <a:defRPr b="0" i="0" sz="1400" u="none" cap="none" strike="noStrike">
+      <a:defRPr sz="1400" b="0" i="0" u="none" strike="noStrike" cap="none">
         <a:solidFill>
           <a:srgbClr val="000000"/>
         </a:solidFill>
@@ -203,7 +203,7 @@
         <a:sym typeface="Arial"/>
       </a:defRPr>
     </a:lvl7pPr>
-    <a:lvl8pPr lvl="7" marR="0" rtl="0" algn="l">
+    <a:lvl8pPr marR="0" lvl="7" algn="l" rtl="0">
       <a:lnSpc>
         <a:spcPct val="100000"/>
       </a:lnSpc>
@@ -217,7 +217,7 @@
         <a:srgbClr val="000000"/>
       </a:buClr>
       <a:buFont typeface="Arial"/>
-      <a:defRPr b="0" i="0" sz="1400" u="none" cap="none" strike="noStrike">
+      <a:defRPr sz="1400" b="0" i="0" u="none" strike="noStrike" cap="none">
         <a:solidFill>
           <a:srgbClr val="000000"/>
         </a:solidFill>
@@ -227,7 +227,7 @@
         <a:sym typeface="Arial"/>
       </a:defRPr>
     </a:lvl8pPr>
-    <a:lvl9pPr lvl="8" marR="0" rtl="0" algn="l">
+    <a:lvl9pPr marR="0" lvl="8" algn="l" rtl="0">
       <a:lnSpc>
         <a:spcPct val="100000"/>
       </a:lnSpc>
@@ -241,7 +241,7 @@
         <a:srgbClr val="000000"/>
       </a:buClr>
       <a:buFont typeface="Arial"/>
-      <a:defRPr b="0" i="0" sz="1400" u="none" cap="none" strike="noStrike">
+      <a:defRPr sz="1400" b="0" i="0" u="none" strike="noStrike" cap="none">
         <a:solidFill>
           <a:srgbClr val="000000"/>
         </a:solidFill>
@@ -254,7 +254,7 @@
   </p:defaultTextStyle>
   <p:extLst>
     <p:ext uri="{EFAFB233-063F-42B5-8137-9DF3F51BA10A}">
-      <p15:sldGuideLst>
+      <p15:sldGuideLst xmlns:p15="http://schemas.microsoft.com/office/powerpoint/2012/main">
         <p15:guide id="1" orient="horz" pos="1620">
           <p15:clr>
             <a:srgbClr val="747775"/>
@@ -271,12 +271,46 @@
 </p:presentation>
 </file>
 
+<file path=ppt/changesInfos/changesInfo1.xml><?xml version="1.0" encoding="utf-8"?>
+<pc:chgInfo xmlns:a="http://schemas.openxmlformats.org/drawingml/2006/main" xmlns:r="http://schemas.openxmlformats.org/officeDocument/2006/relationships" xmlns:ac="http://schemas.microsoft.com/office/drawing/2013/main/command" xmlns:pc="http://schemas.microsoft.com/office/powerpoint/2013/main/command">
+  <pc:docChgLst>
+    <pc:chgData name="Melinda Garren" userId="61c33bd6-118b-44f6-82fe-14b97eb6091e" providerId="ADAL" clId="{4E84933E-3078-4CC0-ADCE-C7196E3182CD}"/>
+    <pc:docChg chg="modSld">
+      <pc:chgData name="Melinda Garren" userId="61c33bd6-118b-44f6-82fe-14b97eb6091e" providerId="ADAL" clId="{4E84933E-3078-4CC0-ADCE-C7196E3182CD}" dt="2026-07-02T14:13:26.775" v="1" actId="20577"/>
+      <pc:docMkLst>
+        <pc:docMk/>
+      </pc:docMkLst>
+      <pc:sldChg chg="modSp mod">
+        <pc:chgData name="Melinda Garren" userId="61c33bd6-118b-44f6-82fe-14b97eb6091e" providerId="ADAL" clId="{4E84933E-3078-4CC0-ADCE-C7196E3182CD}" dt="2026-07-02T14:13:26.775" v="1" actId="20577"/>
+        <pc:sldMkLst>
+          <pc:docMk/>
+          <pc:sldMk cId="0" sldId="256"/>
+        </pc:sldMkLst>
+        <pc:spChg chg="mod">
+          <ac:chgData name="Melinda Garren" userId="61c33bd6-118b-44f6-82fe-14b97eb6091e" providerId="ADAL" clId="{4E84933E-3078-4CC0-ADCE-C7196E3182CD}" dt="2026-07-02T14:13:26.775" v="1" actId="20577"/>
+          <ac:spMkLst>
+            <pc:docMk/>
+            <pc:sldMk cId="0" sldId="256"/>
+            <ac:spMk id="55" creationId="{00000000-0000-0000-0000-000000000000}"/>
+          </ac:spMkLst>
+        </pc:spChg>
+      </pc:sldChg>
+    </pc:docChg>
+  </pc:docChgLst>
+</pc:chgInfo>
+</file>
+
 <file path=ppt/notesMasters/notesMaster1.xml><?xml version="1.0" encoding="utf-8"?>
-<p:notesMaster xmlns:a="http://schemas.openxmlformats.org/drawingml/2006/main" xmlns:r="http://schemas.openxmlformats.org/officeDocument/2006/relationships" xmlns:mc="http://schemas.openxmlformats.org/markup-compatibility/2006" xmlns:mv="urn:schemas-microsoft-com:mac:vml" xmlns:p="http://schemas.openxmlformats.org/presentationml/2006/main" xmlns:c="http://schemas.openxmlformats.org/drawingml/2006/chart" xmlns:dgm="http://schemas.openxmlformats.org/drawingml/2006/diagram" xmlns:o="urn:schemas-microsoft-com:office:office" xmlns:v="urn:schemas-microsoft-com:vml" xmlns:pvml="urn:schemas-microsoft-com:office:powerpoint" xmlns:com="http://schemas.openxmlformats.org/drawingml/2006/compatibility" xmlns:p14="http://schemas.microsoft.com/office/powerpoint/2010/main" xmlns:p15="http://schemas.microsoft.com/office/powerpoint/2012/main" xmlns:ahyp="http://schemas.microsoft.com/office/drawing/2018/hyperlinkcolor">
+<p:notesMaster xmlns:a="http://schemas.openxmlformats.org/drawingml/2006/main" xmlns:r="http://schemas.openxmlformats.org/officeDocument/2006/relationships" xmlns:p="http://schemas.openxmlformats.org/presentationml/2006/main">
   <p:cSld>
+    <p:bg>
+      <p:bgRef idx="1001">
+        <a:schemeClr val="bg1"/>
+      </p:bgRef>
+    </p:bg>
     <p:spTree>
       <p:nvGrpSpPr>
-        <p:cNvPr id="2" name="Shape 2"/>
+        <p:cNvPr id="1" name="Shape 2"/>
         <p:cNvGrpSpPr/>
         <p:nvPr/>
       </p:nvGrpSpPr>
@@ -291,9 +325,11 @@
       <p:sp>
         <p:nvSpPr>
           <p:cNvPr id="3" name="Google Shape;3;n"/>
-          <p:cNvSpPr/>
+          <p:cNvSpPr>
+            <a:spLocks noGrp="1" noRot="1" noChangeAspect="1"/>
+          </p:cNvSpPr>
           <p:nvPr>
-            <p:ph idx="2" type="sldImg"/>
+            <p:ph type="sldImg" idx="2"/>
           </p:nvPr>
         </p:nvSpPr>
         <p:spPr>
@@ -302,9 +338,13 @@
             <a:ext cx="6096075" cy="3429000"/>
           </a:xfrm>
           <a:custGeom>
-            <a:rect b="b" l="l" r="r" t="t"/>
+            <a:avLst/>
+            <a:gdLst/>
+            <a:ahLst/>
+            <a:cxnLst/>
+            <a:rect l="l" t="t" r="r" b="b"/>
             <a:pathLst>
-              <a:path extrusionOk="0" h="120000" w="120000">
+              <a:path w="120000" h="120000" extrusionOk="0">
                 <a:moveTo>
                   <a:pt x="0" y="0"/>
                 </a:moveTo>
@@ -322,23 +362,25 @@
             </a:pathLst>
           </a:custGeom>
           <a:noFill/>
-          <a:ln cap="flat" cmpd="sng" w="9525">
+          <a:ln w="9525" cap="flat" cmpd="sng">
             <a:solidFill>
               <a:srgbClr val="000000"/>
             </a:solidFill>
             <a:prstDash val="solid"/>
             <a:round/>
-            <a:headEnd len="sm" w="sm" type="none"/>
-            <a:tailEnd len="sm" w="sm" type="none"/>
+            <a:headEnd type="none" w="sm" len="sm"/>
+            <a:tailEnd type="none" w="sm" len="sm"/>
           </a:ln>
         </p:spPr>
       </p:sp>
       <p:sp>
         <p:nvSpPr>
           <p:cNvPr id="4" name="Google Shape;4;n"/>
-          <p:cNvSpPr txBox="1"/>
+          <p:cNvSpPr txBox="1">
+            <a:spLocks noGrp="1"/>
+          </p:cNvSpPr>
           <p:nvPr>
-            <p:ph idx="1" type="body"/>
+            <p:ph type="body" idx="1"/>
           </p:nvPr>
         </p:nvSpPr>
         <p:spPr>
@@ -355,11 +397,11 @@
           </a:ln>
         </p:spPr>
         <p:txBody>
-          <a:bodyPr anchorCtr="0" anchor="t" bIns="91425" lIns="91425" spcFirstLastPara="1" rIns="91425" wrap="square" tIns="91425">
+          <a:bodyPr spcFirstLastPara="1" wrap="square" lIns="91425" tIns="91425" rIns="91425" bIns="91425" anchor="t" anchorCtr="0">
             <a:noAutofit/>
           </a:bodyPr>
           <a:lstStyle>
-            <a:lvl1pPr indent="-298450" lvl="0" marL="457200">
+            <a:lvl1pPr marL="457200" lvl="0" indent="-298450">
               <a:spcBef>
                 <a:spcPts val="0"/>
               </a:spcBef>
@@ -370,7 +412,7 @@
               <a:buChar char="●"/>
               <a:defRPr sz="1100"/>
             </a:lvl1pPr>
-            <a:lvl2pPr indent="-298450" lvl="1" marL="914400">
+            <a:lvl2pPr marL="914400" lvl="1" indent="-298450">
               <a:spcBef>
                 <a:spcPts val="0"/>
               </a:spcBef>
@@ -381,7 +423,7 @@
               <a:buChar char="○"/>
               <a:defRPr sz="1100"/>
             </a:lvl2pPr>
-            <a:lvl3pPr indent="-298450" lvl="2" marL="1371600">
+            <a:lvl3pPr marL="1371600" lvl="2" indent="-298450">
               <a:spcBef>
                 <a:spcPts val="0"/>
               </a:spcBef>
@@ -392,7 +434,7 @@
               <a:buChar char="■"/>
               <a:defRPr sz="1100"/>
             </a:lvl3pPr>
-            <a:lvl4pPr indent="-298450" lvl="3" marL="1828800">
+            <a:lvl4pPr marL="1828800" lvl="3" indent="-298450">
               <a:spcBef>
                 <a:spcPts val="0"/>
               </a:spcBef>
@@ -403,7 +445,7 @@
               <a:buChar char="●"/>
               <a:defRPr sz="1100"/>
             </a:lvl4pPr>
-            <a:lvl5pPr indent="-298450" lvl="4" marL="2286000">
+            <a:lvl5pPr marL="2286000" lvl="4" indent="-298450">
               <a:spcBef>
                 <a:spcPts val="0"/>
               </a:spcBef>
@@ -414,7 +456,7 @@
               <a:buChar char="○"/>
               <a:defRPr sz="1100"/>
             </a:lvl5pPr>
-            <a:lvl6pPr indent="-298450" lvl="5" marL="2743200">
+            <a:lvl6pPr marL="2743200" lvl="5" indent="-298450">
               <a:spcBef>
                 <a:spcPts val="0"/>
               </a:spcBef>
@@ -425,7 +467,7 @@
               <a:buChar char="■"/>
               <a:defRPr sz="1100"/>
             </a:lvl6pPr>
-            <a:lvl7pPr indent="-298450" lvl="6" marL="3200400">
+            <a:lvl7pPr marL="3200400" lvl="6" indent="-298450">
               <a:spcBef>
                 <a:spcPts val="0"/>
               </a:spcBef>
@@ -436,7 +478,7 @@
               <a:buChar char="●"/>
               <a:defRPr sz="1100"/>
             </a:lvl7pPr>
-            <a:lvl8pPr indent="-298450" lvl="7" marL="3657600">
+            <a:lvl8pPr marL="3657600" lvl="7" indent="-298450">
               <a:spcBef>
                 <a:spcPts val="0"/>
               </a:spcBef>
@@ -447,7 +489,7 @@
               <a:buChar char="○"/>
               <a:defRPr sz="1100"/>
             </a:lvl8pPr>
-            <a:lvl9pPr indent="-298450" lvl="8" marL="4114800">
+            <a:lvl9pPr marL="4114800" lvl="8" indent="-298450">
               <a:spcBef>
                 <a:spcPts val="0"/>
               </a:spcBef>
@@ -459,14 +501,16 @@
               <a:defRPr sz="1100"/>
             </a:lvl9pPr>
           </a:lstStyle>
-          <a:p/>
+          <a:p>
+            <a:endParaRPr/>
+          </a:p>
         </p:txBody>
       </p:sp>
     </p:spTree>
   </p:cSld>
-  <p:clrMap accent1="accent1" accent2="accent2" accent3="accent3" accent4="accent4" accent5="accent5" accent6="accent6" bg1="lt1" bg2="dk2" tx1="dk1" tx2="lt2" folHlink="folHlink" hlink="hlink"/>
+  <p:clrMap bg1="lt1" tx1="dk1" bg2="dk2" tx2="lt2" accent1="accent1" accent2="accent2" accent3="accent3" accent4="accent4" accent5="accent5" accent6="accent6" hlink="hlink" folHlink="folHlink"/>
   <p:notesStyle>
-    <a:defPPr lvl="0" marR="0" rtl="0" algn="l">
+    <a:defPPr marR="0" lvl="0" algn="l" rtl="0">
       <a:lnSpc>
         <a:spcPct val="100000"/>
       </a:lnSpc>
@@ -477,7 +521,7 @@
         <a:spcPts val="0"/>
       </a:spcAft>
     </a:defPPr>
-    <a:lvl1pPr lvl="0" marR="0" rtl="0" algn="l">
+    <a:lvl1pPr marR="0" lvl="0" algn="l" rtl="0">
       <a:lnSpc>
         <a:spcPct val="100000"/>
       </a:lnSpc>
@@ -491,7 +535,7 @@
         <a:srgbClr val="000000"/>
       </a:buClr>
       <a:buFont typeface="Arial"/>
-      <a:defRPr b="0" i="0" sz="1400" u="none" cap="none" strike="noStrike">
+      <a:defRPr sz="1400" b="0" i="0" u="none" strike="noStrike" cap="none">
         <a:solidFill>
           <a:srgbClr val="000000"/>
         </a:solidFill>
@@ -501,7 +545,7 @@
         <a:sym typeface="Arial"/>
       </a:defRPr>
     </a:lvl1pPr>
-    <a:lvl2pPr lvl="1" marR="0" rtl="0" algn="l">
+    <a:lvl2pPr marR="0" lvl="1" algn="l" rtl="0">
       <a:lnSpc>
         <a:spcPct val="100000"/>
       </a:lnSpc>
@@ -515,7 +559,7 @@
         <a:srgbClr val="000000"/>
       </a:buClr>
       <a:buFont typeface="Arial"/>
-      <a:defRPr b="0" i="0" sz="1400" u="none" cap="none" strike="noStrike">
+      <a:defRPr sz="1400" b="0" i="0" u="none" strike="noStrike" cap="none">
         <a:solidFill>
           <a:srgbClr val="000000"/>
         </a:solidFill>
@@ -525,7 +569,7 @@
         <a:sym typeface="Arial"/>
       </a:defRPr>
     </a:lvl2pPr>
-    <a:lvl3pPr lvl="2" marR="0" rtl="0" algn="l">
+    <a:lvl3pPr marR="0" lvl="2" algn="l" rtl="0">
       <a:lnSpc>
         <a:spcPct val="100000"/>
       </a:lnSpc>
@@ -539,7 +583,7 @@
         <a:srgbClr val="000000"/>
       </a:buClr>
       <a:buFont typeface="Arial"/>
-      <a:defRPr b="0" i="0" sz="1400" u="none" cap="none" strike="noStrike">
+      <a:defRPr sz="1400" b="0" i="0" u="none" strike="noStrike" cap="none">
         <a:solidFill>
           <a:srgbClr val="000000"/>
         </a:solidFill>
@@ -549,7 +593,7 @@
         <a:sym typeface="Arial"/>
       </a:defRPr>
     </a:lvl3pPr>
-    <a:lvl4pPr lvl="3" marR="0" rtl="0" algn="l">
+    <a:lvl4pPr marR="0" lvl="3" algn="l" rtl="0">
       <a:lnSpc>
         <a:spcPct val="100000"/>
       </a:lnSpc>
@@ -563,7 +607,7 @@
         <a:srgbClr val="000000"/>
       </a:buClr>
       <a:buFont typeface="Arial"/>
-      <a:defRPr b="0" i="0" sz="1400" u="none" cap="none" strike="noStrike">
+      <a:defRPr sz="1400" b="0" i="0" u="none" strike="noStrike" cap="none">
         <a:solidFill>
           <a:srgbClr val="000000"/>
         </a:solidFill>
@@ -573,7 +617,7 @@
         <a:sym typeface="Arial"/>
       </a:defRPr>
     </a:lvl4pPr>
-    <a:lvl5pPr lvl="4" marR="0" rtl="0" algn="l">
+    <a:lvl5pPr marR="0" lvl="4" algn="l" rtl="0">
       <a:lnSpc>
         <a:spcPct val="100000"/>
       </a:lnSpc>
@@ -587,7 +631,7 @@
         <a:srgbClr val="000000"/>
       </a:buClr>
       <a:buFont typeface="Arial"/>
-      <a:defRPr b="0" i="0" sz="1400" u="none" cap="none" strike="noStrike">
+      <a:defRPr sz="1400" b="0" i="0" u="none" strike="noStrike" cap="none">
         <a:solidFill>
           <a:srgbClr val="000000"/>
         </a:solidFill>
@@ -597,7 +641,7 @@
         <a:sym typeface="Arial"/>
       </a:defRPr>
     </a:lvl5pPr>
-    <a:lvl6pPr lvl="5" marR="0" rtl="0" algn="l">
+    <a:lvl6pPr marR="0" lvl="5" algn="l" rtl="0">
       <a:lnSpc>
         <a:spcPct val="100000"/>
       </a:lnSpc>
@@ -611,7 +655,7 @@
         <a:srgbClr val="000000"/>
       </a:buClr>
       <a:buFont typeface="Arial"/>
-      <a:defRPr b="0" i="0" sz="1400" u="none" cap="none" strike="noStrike">
+      <a:defRPr sz="1400" b="0" i="0" u="none" strike="noStrike" cap="none">
         <a:solidFill>
           <a:srgbClr val="000000"/>
         </a:solidFill>
@@ -621,7 +665,7 @@
         <a:sym typeface="Arial"/>
       </a:defRPr>
     </a:lvl6pPr>
-    <a:lvl7pPr lvl="6" marR="0" rtl="0" algn="l">
+    <a:lvl7pPr marR="0" lvl="6" algn="l" rtl="0">
       <a:lnSpc>
         <a:spcPct val="100000"/>
       </a:lnSpc>
@@ -635,7 +679,7 @@
         <a:srgbClr val="000000"/>
       </a:buClr>
       <a:buFont typeface="Arial"/>
-      <a:defRPr b="0" i="0" sz="1400" u="none" cap="none" strike="noStrike">
+      <a:defRPr sz="1400" b="0" i="0" u="none" strike="noStrike" cap="none">
         <a:solidFill>
           <a:srgbClr val="000000"/>
         </a:solidFill>
@@ -645,7 +689,7 @@
         <a:sym typeface="Arial"/>
       </a:defRPr>
     </a:lvl7pPr>
-    <a:lvl8pPr lvl="7" marR="0" rtl="0" algn="l">
+    <a:lvl8pPr marR="0" lvl="7" algn="l" rtl="0">
       <a:lnSpc>
         <a:spcPct val="100000"/>
       </a:lnSpc>
@@ -659,7 +703,7 @@
         <a:srgbClr val="000000"/>
       </a:buClr>
       <a:buFont typeface="Arial"/>
-      <a:defRPr b="0" i="0" sz="1400" u="none" cap="none" strike="noStrike">
+      <a:defRPr sz="1400" b="0" i="0" u="none" strike="noStrike" cap="none">
         <a:solidFill>
           <a:srgbClr val="000000"/>
         </a:solidFill>
@@ -669,7 +713,7 @@
         <a:sym typeface="Arial"/>
       </a:defRPr>
     </a:lvl8pPr>
-    <a:lvl9pPr lvl="8" marR="0" rtl="0" algn="l">
+    <a:lvl9pPr marR="0" lvl="8" algn="l" rtl="0">
       <a:lnSpc>
         <a:spcPct val="100000"/>
       </a:lnSpc>
@@ -683,7 +727,7 @@
         <a:srgbClr val="000000"/>
       </a:buClr>
       <a:buFont typeface="Arial"/>
-      <a:defRPr b="0" i="0" sz="1400" u="none" cap="none" strike="noStrike">
+      <a:defRPr sz="1400" b="0" i="0" u="none" strike="noStrike" cap="none">
         <a:solidFill>
           <a:srgbClr val="000000"/>
         </a:solidFill>
@@ -698,11 +742,11 @@
 </file>
 
 <file path=ppt/notesSlides/notesSlide1.xml><?xml version="1.0" encoding="utf-8"?>
-<p:notes xmlns:a="http://schemas.openxmlformats.org/drawingml/2006/main" xmlns:r="http://schemas.openxmlformats.org/officeDocument/2006/relationships" xmlns:mc="http://schemas.openxmlformats.org/markup-compatibility/2006" xmlns:mv="urn:schemas-microsoft-com:mac:vml" xmlns:p="http://schemas.openxmlformats.org/presentationml/2006/main" xmlns:c="http://schemas.openxmlformats.org/drawingml/2006/chart" xmlns:dgm="http://schemas.openxmlformats.org/drawingml/2006/diagram" xmlns:o="urn:schemas-microsoft-com:office:office" xmlns:v="urn:schemas-microsoft-com:vml" xmlns:pvml="urn:schemas-microsoft-com:office:powerpoint" xmlns:com="http://schemas.openxmlformats.org/drawingml/2006/compatibility" xmlns:p14="http://schemas.microsoft.com/office/powerpoint/2010/main" xmlns:p15="http://schemas.microsoft.com/office/powerpoint/2012/main" xmlns:ahyp="http://schemas.microsoft.com/office/drawing/2018/hyperlinkcolor" showMasterPhAnim="0" showMasterSp="0">
+<p:notes xmlns:a="http://schemas.openxmlformats.org/drawingml/2006/main" xmlns:r="http://schemas.openxmlformats.org/officeDocument/2006/relationships" xmlns:p="http://schemas.openxmlformats.org/presentationml/2006/main" showMasterSp="0" showMasterPhAnim="0">
   <p:cSld>
     <p:spTree>
       <p:nvGrpSpPr>
-        <p:cNvPr id="50" name="Shape 50"/>
+        <p:cNvPr id="1" name="Shape 50"/>
         <p:cNvGrpSpPr/>
         <p:nvPr/>
       </p:nvGrpSpPr>
@@ -717,20 +761,26 @@
       <p:sp>
         <p:nvSpPr>
           <p:cNvPr id="51" name="Google Shape;51;p:notes"/>
-          <p:cNvSpPr/>
+          <p:cNvSpPr>
+            <a:spLocks noGrp="1" noRot="1" noChangeAspect="1"/>
+          </p:cNvSpPr>
           <p:nvPr>
-            <p:ph idx="2" type="sldImg"/>
+            <p:ph type="sldImg" idx="2"/>
           </p:nvPr>
         </p:nvSpPr>
         <p:spPr>
           <a:xfrm>
-            <a:off x="381300" y="685800"/>
-            <a:ext cx="6096075" cy="3429000"/>
+            <a:off x="381000" y="685800"/>
+            <a:ext cx="6096000" cy="3429000"/>
           </a:xfrm>
           <a:custGeom>
-            <a:rect b="b" l="l" r="r" t="t"/>
+            <a:avLst/>
+            <a:gdLst/>
+            <a:ahLst/>
+            <a:cxnLst/>
+            <a:rect l="l" t="t" r="r" b="b"/>
             <a:pathLst>
-              <a:path extrusionOk="0" h="120000" w="120000">
+              <a:path w="120000" h="120000" extrusionOk="0">
                 <a:moveTo>
                   <a:pt x="0" y="0"/>
                 </a:moveTo>
@@ -752,9 +802,11 @@
       <p:sp>
         <p:nvSpPr>
           <p:cNvPr id="52" name="Google Shape;52;p:notes"/>
-          <p:cNvSpPr txBox="1"/>
+          <p:cNvSpPr txBox="1">
+            <a:spLocks noGrp="1"/>
+          </p:cNvSpPr>
           <p:nvPr>
-            <p:ph idx="1" type="body"/>
+            <p:ph type="body" idx="1"/>
           </p:nvPr>
         </p:nvSpPr>
         <p:spPr>
@@ -767,12 +819,12 @@
           </a:prstGeom>
         </p:spPr>
         <p:txBody>
-          <a:bodyPr anchorCtr="0" anchor="t" bIns="91425" lIns="91425" spcFirstLastPara="1" rIns="91425" wrap="square" tIns="91425">
+          <a:bodyPr spcFirstLastPara="1" wrap="square" lIns="91425" tIns="91425" rIns="91425" bIns="91425" anchor="t" anchorCtr="0">
             <a:noAutofit/>
           </a:bodyPr>
           <a:lstStyle/>
           <a:p>
-            <a:pPr indent="0" lvl="0" marL="0" rtl="0" algn="l">
+            <a:pPr marL="0" lvl="0" indent="0" algn="l" rtl="0">
               <a:spcBef>
                 <a:spcPts val="0"/>
               </a:spcBef>
@@ -781,9 +833,6 @@
               </a:spcAft>
               <a:buNone/>
             </a:pPr>
-            <a:r>
-              <a:t/>
-            </a:r>
             <a:endParaRPr/>
           </a:p>
         </p:txBody>
@@ -797,11 +846,11 @@
 </file>
 
 <file path=ppt/notesSlides/notesSlide2.xml><?xml version="1.0" encoding="utf-8"?>
-<p:notes xmlns:a="http://schemas.openxmlformats.org/drawingml/2006/main" xmlns:r="http://schemas.openxmlformats.org/officeDocument/2006/relationships" xmlns:mc="http://schemas.openxmlformats.org/markup-compatibility/2006" xmlns:mv="urn:schemas-microsoft-com:mac:vml" xmlns:p="http://schemas.openxmlformats.org/presentationml/2006/main" xmlns:c="http://schemas.openxmlformats.org/drawingml/2006/chart" xmlns:dgm="http://schemas.openxmlformats.org/drawingml/2006/diagram" xmlns:o="urn:schemas-microsoft-com:office:office" xmlns:v="urn:schemas-microsoft-com:vml" xmlns:pvml="urn:schemas-microsoft-com:office:powerpoint" xmlns:com="http://schemas.openxmlformats.org/drawingml/2006/compatibility" xmlns:p14="http://schemas.microsoft.com/office/powerpoint/2010/main" xmlns:p15="http://schemas.microsoft.com/office/powerpoint/2012/main" xmlns:ahyp="http://schemas.microsoft.com/office/drawing/2018/hyperlinkcolor" showMasterPhAnim="0" showMasterSp="0">
+<p:notes xmlns:a="http://schemas.openxmlformats.org/drawingml/2006/main" xmlns:r="http://schemas.openxmlformats.org/officeDocument/2006/relationships" xmlns:p="http://schemas.openxmlformats.org/presentationml/2006/main" showMasterSp="0" showMasterPhAnim="0">
   <p:cSld>
     <p:spTree>
       <p:nvGrpSpPr>
-        <p:cNvPr id="57" name="Shape 57"/>
+        <p:cNvPr id="1" name="Shape 57"/>
         <p:cNvGrpSpPr/>
         <p:nvPr/>
       </p:nvGrpSpPr>
@@ -816,9 +865,11 @@
       <p:sp>
         <p:nvSpPr>
           <p:cNvPr id="58" name="Google Shape;58;g3f052a05d3b_0_0:notes"/>
-          <p:cNvSpPr/>
+          <p:cNvSpPr>
+            <a:spLocks noGrp="1" noRot="1" noChangeAspect="1"/>
+          </p:cNvSpPr>
           <p:nvPr>
-            <p:ph idx="2" type="sldImg"/>
+            <p:ph type="sldImg" idx="2"/>
           </p:nvPr>
         </p:nvSpPr>
         <p:spPr>
@@ -827,9 +878,13 @@
             <a:ext cx="6096000" cy="3429000"/>
           </a:xfrm>
           <a:custGeom>
-            <a:rect b="b" l="l" r="r" t="t"/>
+            <a:avLst/>
+            <a:gdLst/>
+            <a:ahLst/>
+            <a:cxnLst/>
+            <a:rect l="l" t="t" r="r" b="b"/>
             <a:pathLst>
-              <a:path extrusionOk="0" h="120000" w="120000">
+              <a:path w="120000" h="120000" extrusionOk="0">
                 <a:moveTo>
                   <a:pt x="0" y="0"/>
                 </a:moveTo>
@@ -851,9 +906,11 @@
       <p:sp>
         <p:nvSpPr>
           <p:cNvPr id="59" name="Google Shape;59;g3f052a05d3b_0_0:notes"/>
-          <p:cNvSpPr txBox="1"/>
+          <p:cNvSpPr txBox="1">
+            <a:spLocks noGrp="1"/>
+          </p:cNvSpPr>
           <p:nvPr>
-            <p:ph idx="1" type="body"/>
+            <p:ph type="body" idx="1"/>
           </p:nvPr>
         </p:nvSpPr>
         <p:spPr>
@@ -866,12 +923,12 @@
           </a:prstGeom>
         </p:spPr>
         <p:txBody>
-          <a:bodyPr anchorCtr="0" anchor="t" bIns="91425" lIns="91425" spcFirstLastPara="1" rIns="91425" wrap="square" tIns="91425">
+          <a:bodyPr spcFirstLastPara="1" wrap="square" lIns="91425" tIns="91425" rIns="91425" bIns="91425" anchor="t" anchorCtr="0">
             <a:noAutofit/>
           </a:bodyPr>
           <a:lstStyle/>
           <a:p>
-            <a:pPr indent="0" lvl="0" marL="0" rtl="0" algn="l">
+            <a:pPr marL="0" lvl="0" indent="0" algn="l" rtl="0">
               <a:spcBef>
                 <a:spcPts val="0"/>
               </a:spcBef>
@@ -880,9 +937,6 @@
               </a:spcAft>
               <a:buNone/>
             </a:pPr>
-            <a:r>
-              <a:t/>
-            </a:r>
             <a:endParaRPr/>
           </a:p>
         </p:txBody>
@@ -896,11 +950,11 @@
 </file>
 
 <file path=ppt/notesSlides/notesSlide3.xml><?xml version="1.0" encoding="utf-8"?>
-<p:notes xmlns:a="http://schemas.openxmlformats.org/drawingml/2006/main" xmlns:r="http://schemas.openxmlformats.org/officeDocument/2006/relationships" xmlns:mc="http://schemas.openxmlformats.org/markup-compatibility/2006" xmlns:mv="urn:schemas-microsoft-com:mac:vml" xmlns:p="http://schemas.openxmlformats.org/presentationml/2006/main" xmlns:c="http://schemas.openxmlformats.org/drawingml/2006/chart" xmlns:dgm="http://schemas.openxmlformats.org/drawingml/2006/diagram" xmlns:o="urn:schemas-microsoft-com:office:office" xmlns:v="urn:schemas-microsoft-com:vml" xmlns:pvml="urn:schemas-microsoft-com:office:powerpoint" xmlns:com="http://schemas.openxmlformats.org/drawingml/2006/compatibility" xmlns:p14="http://schemas.microsoft.com/office/powerpoint/2010/main" xmlns:p15="http://schemas.microsoft.com/office/powerpoint/2012/main" xmlns:ahyp="http://schemas.microsoft.com/office/drawing/2018/hyperlinkcolor" showMasterPhAnim="0" showMasterSp="0">
+<p:notes xmlns:a="http://schemas.openxmlformats.org/drawingml/2006/main" xmlns:r="http://schemas.openxmlformats.org/officeDocument/2006/relationships" xmlns:p="http://schemas.openxmlformats.org/presentationml/2006/main" showMasterSp="0" showMasterPhAnim="0">
   <p:cSld>
     <p:spTree>
       <p:nvGrpSpPr>
-        <p:cNvPr id="63" name="Shape 63"/>
+        <p:cNvPr id="1" name="Shape 63"/>
         <p:cNvGrpSpPr/>
         <p:nvPr/>
       </p:nvGrpSpPr>
@@ -915,9 +969,11 @@
       <p:sp>
         <p:nvSpPr>
           <p:cNvPr id="64" name="Google Shape;64;g3f052a05d3b_0_5:notes"/>
-          <p:cNvSpPr/>
+          <p:cNvSpPr>
+            <a:spLocks noGrp="1" noRot="1" noChangeAspect="1"/>
+          </p:cNvSpPr>
           <p:nvPr>
-            <p:ph idx="2" type="sldImg"/>
+            <p:ph type="sldImg" idx="2"/>
           </p:nvPr>
         </p:nvSpPr>
         <p:spPr>
@@ -926,9 +982,13 @@
             <a:ext cx="6096000" cy="3429000"/>
           </a:xfrm>
           <a:custGeom>
-            <a:rect b="b" l="l" r="r" t="t"/>
+            <a:avLst/>
+            <a:gdLst/>
+            <a:ahLst/>
+            <a:cxnLst/>
+            <a:rect l="l" t="t" r="r" b="b"/>
             <a:pathLst>
-              <a:path extrusionOk="0" h="120000" w="120000">
+              <a:path w="120000" h="120000" extrusionOk="0">
                 <a:moveTo>
                   <a:pt x="0" y="0"/>
                 </a:moveTo>
@@ -950,9 +1010,11 @@
       <p:sp>
         <p:nvSpPr>
           <p:cNvPr id="65" name="Google Shape;65;g3f052a05d3b_0_5:notes"/>
-          <p:cNvSpPr txBox="1"/>
+          <p:cNvSpPr txBox="1">
+            <a:spLocks noGrp="1"/>
+          </p:cNvSpPr>
           <p:nvPr>
-            <p:ph idx="1" type="body"/>
+            <p:ph type="body" idx="1"/>
           </p:nvPr>
         </p:nvSpPr>
         <p:spPr>
@@ -965,12 +1027,12 @@
           </a:prstGeom>
         </p:spPr>
         <p:txBody>
-          <a:bodyPr anchorCtr="0" anchor="t" bIns="91425" lIns="91425" spcFirstLastPara="1" rIns="91425" wrap="square" tIns="91425">
+          <a:bodyPr spcFirstLastPara="1" wrap="square" lIns="91425" tIns="91425" rIns="91425" bIns="91425" anchor="t" anchorCtr="0">
             <a:noAutofit/>
           </a:bodyPr>
           <a:lstStyle/>
           <a:p>
-            <a:pPr indent="0" lvl="0" marL="0" rtl="0" algn="l">
+            <a:pPr marL="0" lvl="0" indent="0" algn="l" rtl="0">
               <a:spcBef>
                 <a:spcPts val="0"/>
               </a:spcBef>
@@ -979,9 +1041,6 @@
               </a:spcAft>
               <a:buNone/>
             </a:pPr>
-            <a:r>
-              <a:t/>
-            </a:r>
             <a:endParaRPr/>
           </a:p>
         </p:txBody>
@@ -995,11 +1054,11 @@
 </file>
 
 <file path=ppt/slideLayouts/slideLayout1.xml><?xml version="1.0" encoding="utf-8"?>
-<p:sldLayout xmlns:a="http://schemas.openxmlformats.org/drawingml/2006/main" xmlns:r="http://schemas.openxmlformats.org/officeDocument/2006/relationships" xmlns:mc="http://schemas.openxmlformats.org/markup-compatibility/2006" xmlns:mv="urn:schemas-microsoft-com:mac:vml" xmlns:p="http://schemas.openxmlformats.org/presentationml/2006/main" xmlns:c="http://schemas.openxmlformats.org/drawingml/2006/chart" xmlns:dgm="http://schemas.openxmlformats.org/drawingml/2006/diagram" xmlns:o="urn:schemas-microsoft-com:office:office" xmlns:v="urn:schemas-microsoft-com:vml" xmlns:pvml="urn:schemas-microsoft-com:office:powerpoint" xmlns:com="http://schemas.openxmlformats.org/drawingml/2006/compatibility" xmlns:p14="http://schemas.microsoft.com/office/powerpoint/2010/main" xmlns:p15="http://schemas.microsoft.com/office/powerpoint/2012/main" xmlns:ahyp="http://schemas.microsoft.com/office/drawing/2018/hyperlinkcolor" matchingName="Title slide" type="title">
+<p:sldLayout xmlns:a="http://schemas.openxmlformats.org/drawingml/2006/main" xmlns:r="http://schemas.openxmlformats.org/officeDocument/2006/relationships" xmlns:p="http://schemas.openxmlformats.org/presentationml/2006/main" matchingName="Title slide" type="title">
   <p:cSld name="TITLE">
     <p:spTree>
       <p:nvGrpSpPr>
-        <p:cNvPr id="9" name="Shape 9"/>
+        <p:cNvPr id="1" name="Shape 9"/>
         <p:cNvGrpSpPr/>
         <p:nvPr/>
       </p:nvGrpSpPr>
@@ -1014,7 +1073,9 @@
       <p:sp>
         <p:nvSpPr>
           <p:cNvPr id="10" name="Google Shape;10;p2"/>
-          <p:cNvSpPr txBox="1"/>
+          <p:cNvSpPr txBox="1">
+            <a:spLocks noGrp="1"/>
+          </p:cNvSpPr>
           <p:nvPr>
             <p:ph type="ctrTitle"/>
           </p:nvPr>
@@ -1029,7 +1090,7 @@
           </a:prstGeom>
         </p:spPr>
         <p:txBody>
-          <a:bodyPr anchorCtr="0" anchor="b" bIns="91425" lIns="91425" spcFirstLastPara="1" rIns="91425" wrap="square" tIns="91425">
+          <a:bodyPr spcFirstLastPara="1" wrap="square" lIns="91425" tIns="91425" rIns="91425" bIns="91425" anchor="b" anchorCtr="0">
             <a:normAutofit/>
           </a:bodyPr>
           <a:lstStyle>
@@ -1133,15 +1194,19 @@
               <a:defRPr sz="5200"/>
             </a:lvl9pPr>
           </a:lstStyle>
-          <a:p/>
+          <a:p>
+            <a:endParaRPr/>
+          </a:p>
         </p:txBody>
       </p:sp>
       <p:sp>
         <p:nvSpPr>
           <p:cNvPr id="11" name="Google Shape;11;p2"/>
-          <p:cNvSpPr txBox="1"/>
+          <p:cNvSpPr txBox="1">
+            <a:spLocks noGrp="1"/>
+          </p:cNvSpPr>
           <p:nvPr>
-            <p:ph idx="1" type="subTitle"/>
+            <p:ph type="subTitle" idx="1"/>
           </p:nvPr>
         </p:nvSpPr>
         <p:spPr>
@@ -1154,7 +1219,7 @@
           </a:prstGeom>
         </p:spPr>
         <p:txBody>
-          <a:bodyPr anchorCtr="0" anchor="t" bIns="91425" lIns="91425" spcFirstLastPara="1" rIns="91425" wrap="square" tIns="91425">
+          <a:bodyPr spcFirstLastPara="1" wrap="square" lIns="91425" tIns="91425" rIns="91425" bIns="91425" anchor="t" anchorCtr="0">
             <a:normAutofit/>
           </a:bodyPr>
           <a:lstStyle>
@@ -1285,15 +1350,19 @@
               <a:defRPr sz="2800"/>
             </a:lvl9pPr>
           </a:lstStyle>
-          <a:p/>
+          <a:p>
+            <a:endParaRPr/>
+          </a:p>
         </p:txBody>
       </p:sp>
       <p:sp>
         <p:nvSpPr>
           <p:cNvPr id="12" name="Google Shape;12;p2"/>
-          <p:cNvSpPr txBox="1"/>
+          <p:cNvSpPr txBox="1">
+            <a:spLocks noGrp="1"/>
+          </p:cNvSpPr>
           <p:nvPr>
-            <p:ph idx="12" type="sldNum"/>
+            <p:ph type="sldNum" idx="12"/>
           </p:nvPr>
         </p:nvSpPr>
         <p:spPr>
@@ -1306,7 +1375,7 @@
           </a:prstGeom>
         </p:spPr>
         <p:txBody>
-          <a:bodyPr anchorCtr="0" anchor="ctr" bIns="91425" lIns="91425" spcFirstLastPara="1" rIns="91425" wrap="square" tIns="91425">
+          <a:bodyPr spcFirstLastPara="1" wrap="square" lIns="91425" tIns="91425" rIns="91425" bIns="91425" anchor="ctr" anchorCtr="0">
             <a:normAutofit/>
           </a:bodyPr>
           <a:lstStyle>
@@ -1348,7 +1417,7 @@
             </a:lvl9pPr>
           </a:lstStyle>
           <a:p>
-            <a:pPr indent="0" lvl="0" marL="0" rtl="0" algn="r">
+            <a:pPr marL="0" lvl="0" indent="0" algn="r" rtl="0">
               <a:spcBef>
                 <a:spcPts val="0"/>
               </a:spcBef>
@@ -1374,11 +1443,11 @@
 </file>
 
 <file path=ppt/slideLayouts/slideLayout10.xml><?xml version="1.0" encoding="utf-8"?>
-<p:sldLayout xmlns:a="http://schemas.openxmlformats.org/drawingml/2006/main" xmlns:r="http://schemas.openxmlformats.org/officeDocument/2006/relationships" xmlns:mc="http://schemas.openxmlformats.org/markup-compatibility/2006" xmlns:mv="urn:schemas-microsoft-com:mac:vml" xmlns:p="http://schemas.openxmlformats.org/presentationml/2006/main" xmlns:c="http://schemas.openxmlformats.org/drawingml/2006/chart" xmlns:dgm="http://schemas.openxmlformats.org/drawingml/2006/diagram" xmlns:o="urn:schemas-microsoft-com:office:office" xmlns:v="urn:schemas-microsoft-com:vml" xmlns:pvml="urn:schemas-microsoft-com:office:powerpoint" xmlns:com="http://schemas.openxmlformats.org/drawingml/2006/compatibility" xmlns:p14="http://schemas.microsoft.com/office/powerpoint/2010/main" xmlns:p15="http://schemas.microsoft.com/office/powerpoint/2012/main" xmlns:ahyp="http://schemas.microsoft.com/office/drawing/2018/hyperlinkcolor" matchingName="Big number">
+<p:sldLayout xmlns:a="http://schemas.openxmlformats.org/drawingml/2006/main" xmlns:r="http://schemas.openxmlformats.org/officeDocument/2006/relationships" xmlns:p="http://schemas.openxmlformats.org/presentationml/2006/main" matchingName="Big number">
   <p:cSld name="BIG_NUMBER">
     <p:spTree>
       <p:nvGrpSpPr>
-        <p:cNvPr id="44" name="Shape 44"/>
+        <p:cNvPr id="1" name="Shape 44"/>
         <p:cNvGrpSpPr/>
         <p:nvPr/>
       </p:nvGrpSpPr>
@@ -1393,9 +1462,11 @@
       <p:sp>
         <p:nvSpPr>
           <p:cNvPr id="45" name="Google Shape;45;p11"/>
-          <p:cNvSpPr txBox="1"/>
+          <p:cNvSpPr txBox="1">
+            <a:spLocks noGrp="1"/>
+          </p:cNvSpPr>
           <p:nvPr>
-            <p:ph hasCustomPrompt="1" type="title"/>
+            <p:ph type="title" hasCustomPrompt="1"/>
           </p:nvPr>
         </p:nvSpPr>
         <p:spPr>
@@ -1408,7 +1479,7 @@
           </a:prstGeom>
         </p:spPr>
         <p:txBody>
-          <a:bodyPr anchorCtr="0" anchor="b" bIns="91425" lIns="91425" spcFirstLastPara="1" rIns="91425" wrap="square" tIns="91425">
+          <a:bodyPr spcFirstLastPara="1" wrap="square" lIns="91425" tIns="91425" rIns="91425" bIns="91425" anchor="b" anchorCtr="0">
             <a:normAutofit/>
           </a:bodyPr>
           <a:lstStyle>
@@ -1522,9 +1593,11 @@
       <p:sp>
         <p:nvSpPr>
           <p:cNvPr id="46" name="Google Shape;46;p11"/>
-          <p:cNvSpPr txBox="1"/>
+          <p:cNvSpPr txBox="1">
+            <a:spLocks noGrp="1"/>
+          </p:cNvSpPr>
           <p:nvPr>
-            <p:ph idx="1" type="body"/>
+            <p:ph type="body" idx="1"/>
           </p:nvPr>
         </p:nvSpPr>
         <p:spPr>
@@ -1537,11 +1610,11 @@
           </a:prstGeom>
         </p:spPr>
         <p:txBody>
-          <a:bodyPr anchorCtr="0" anchor="t" bIns="91425" lIns="91425" spcFirstLastPara="1" rIns="91425" wrap="square" tIns="91425">
+          <a:bodyPr spcFirstLastPara="1" wrap="square" lIns="91425" tIns="91425" rIns="91425" bIns="91425" anchor="t" anchorCtr="0">
             <a:normAutofit/>
           </a:bodyPr>
           <a:lstStyle>
-            <a:lvl1pPr indent="-342900" lvl="0" marL="457200" algn="ctr">
+            <a:lvl1pPr marL="457200" lvl="0" indent="-342900" algn="ctr">
               <a:spcBef>
                 <a:spcPts val="0"/>
               </a:spcBef>
@@ -1552,7 +1625,7 @@
               <a:buChar char="●"/>
               <a:defRPr/>
             </a:lvl1pPr>
-            <a:lvl2pPr indent="-317500" lvl="1" marL="914400" algn="ctr">
+            <a:lvl2pPr marL="914400" lvl="1" indent="-317500" algn="ctr">
               <a:spcBef>
                 <a:spcPts val="0"/>
               </a:spcBef>
@@ -1563,7 +1636,7 @@
               <a:buChar char="○"/>
               <a:defRPr/>
             </a:lvl2pPr>
-            <a:lvl3pPr indent="-317500" lvl="2" marL="1371600" algn="ctr">
+            <a:lvl3pPr marL="1371600" lvl="2" indent="-317500" algn="ctr">
               <a:spcBef>
                 <a:spcPts val="0"/>
               </a:spcBef>
@@ -1574,7 +1647,7 @@
               <a:buChar char="■"/>
               <a:defRPr/>
             </a:lvl3pPr>
-            <a:lvl4pPr indent="-317500" lvl="3" marL="1828800" algn="ctr">
+            <a:lvl4pPr marL="1828800" lvl="3" indent="-317500" algn="ctr">
               <a:spcBef>
                 <a:spcPts val="0"/>
               </a:spcBef>
@@ -1585,7 +1658,7 @@
               <a:buChar char="●"/>
               <a:defRPr/>
             </a:lvl4pPr>
-            <a:lvl5pPr indent="-317500" lvl="4" marL="2286000" algn="ctr">
+            <a:lvl5pPr marL="2286000" lvl="4" indent="-317500" algn="ctr">
               <a:spcBef>
                 <a:spcPts val="0"/>
               </a:spcBef>
@@ -1596,7 +1669,7 @@
               <a:buChar char="○"/>
               <a:defRPr/>
             </a:lvl5pPr>
-            <a:lvl6pPr indent="-317500" lvl="5" marL="2743200" algn="ctr">
+            <a:lvl6pPr marL="2743200" lvl="5" indent="-317500" algn="ctr">
               <a:spcBef>
                 <a:spcPts val="0"/>
               </a:spcBef>
@@ -1607,7 +1680,7 @@
               <a:buChar char="■"/>
               <a:defRPr/>
             </a:lvl6pPr>
-            <a:lvl7pPr indent="-317500" lvl="6" marL="3200400" algn="ctr">
+            <a:lvl7pPr marL="3200400" lvl="6" indent="-317500" algn="ctr">
               <a:spcBef>
                 <a:spcPts val="0"/>
               </a:spcBef>
@@ -1618,7 +1691,7 @@
               <a:buChar char="●"/>
               <a:defRPr/>
             </a:lvl7pPr>
-            <a:lvl8pPr indent="-317500" lvl="7" marL="3657600" algn="ctr">
+            <a:lvl8pPr marL="3657600" lvl="7" indent="-317500" algn="ctr">
               <a:spcBef>
                 <a:spcPts val="0"/>
               </a:spcBef>
@@ -1629,7 +1702,7 @@
               <a:buChar char="○"/>
               <a:defRPr/>
             </a:lvl8pPr>
-            <a:lvl9pPr indent="-317500" lvl="8" marL="4114800" algn="ctr">
+            <a:lvl9pPr marL="4114800" lvl="8" indent="-317500" algn="ctr">
               <a:spcBef>
                 <a:spcPts val="0"/>
               </a:spcBef>
@@ -1641,15 +1714,19 @@
               <a:defRPr/>
             </a:lvl9pPr>
           </a:lstStyle>
-          <a:p/>
+          <a:p>
+            <a:endParaRPr/>
+          </a:p>
         </p:txBody>
       </p:sp>
       <p:sp>
         <p:nvSpPr>
           <p:cNvPr id="47" name="Google Shape;47;p11"/>
-          <p:cNvSpPr txBox="1"/>
+          <p:cNvSpPr txBox="1">
+            <a:spLocks noGrp="1"/>
+          </p:cNvSpPr>
           <p:nvPr>
-            <p:ph idx="12" type="sldNum"/>
+            <p:ph type="sldNum" idx="12"/>
           </p:nvPr>
         </p:nvSpPr>
         <p:spPr>
@@ -1662,7 +1739,7 @@
           </a:prstGeom>
         </p:spPr>
         <p:txBody>
-          <a:bodyPr anchorCtr="0" anchor="ctr" bIns="91425" lIns="91425" spcFirstLastPara="1" rIns="91425" wrap="square" tIns="91425">
+          <a:bodyPr spcFirstLastPara="1" wrap="square" lIns="91425" tIns="91425" rIns="91425" bIns="91425" anchor="ctr" anchorCtr="0">
             <a:normAutofit/>
           </a:bodyPr>
           <a:lstStyle>
@@ -1704,7 +1781,7 @@
             </a:lvl9pPr>
           </a:lstStyle>
           <a:p>
-            <a:pPr indent="0" lvl="0" marL="0" rtl="0" algn="r">
+            <a:pPr marL="0" lvl="0" indent="0" algn="r" rtl="0">
               <a:spcBef>
                 <a:spcPts val="0"/>
               </a:spcBef>
@@ -1730,11 +1807,11 @@
 </file>
 
 <file path=ppt/slideLayouts/slideLayout11.xml><?xml version="1.0" encoding="utf-8"?>
-<p:sldLayout xmlns:a="http://schemas.openxmlformats.org/drawingml/2006/main" xmlns:r="http://schemas.openxmlformats.org/officeDocument/2006/relationships" xmlns:mc="http://schemas.openxmlformats.org/markup-compatibility/2006" xmlns:mv="urn:schemas-microsoft-com:mac:vml" xmlns:p="http://schemas.openxmlformats.org/presentationml/2006/main" xmlns:c="http://schemas.openxmlformats.org/drawingml/2006/chart" xmlns:dgm="http://schemas.openxmlformats.org/drawingml/2006/diagram" xmlns:o="urn:schemas-microsoft-com:office:office" xmlns:v="urn:schemas-microsoft-com:vml" xmlns:pvml="urn:schemas-microsoft-com:office:powerpoint" xmlns:com="http://schemas.openxmlformats.org/drawingml/2006/compatibility" xmlns:p14="http://schemas.microsoft.com/office/powerpoint/2010/main" xmlns:p15="http://schemas.microsoft.com/office/powerpoint/2012/main" xmlns:ahyp="http://schemas.microsoft.com/office/drawing/2018/hyperlinkcolor" matchingName="Blank" type="blank">
+<p:sldLayout xmlns:a="http://schemas.openxmlformats.org/drawingml/2006/main" xmlns:r="http://schemas.openxmlformats.org/officeDocument/2006/relationships" xmlns:p="http://schemas.openxmlformats.org/presentationml/2006/main" matchingName="Blank" type="blank">
   <p:cSld name="BLANK">
     <p:spTree>
       <p:nvGrpSpPr>
-        <p:cNvPr id="48" name="Shape 48"/>
+        <p:cNvPr id="1" name="Shape 48"/>
         <p:cNvGrpSpPr/>
         <p:nvPr/>
       </p:nvGrpSpPr>
@@ -1749,9 +1826,11 @@
       <p:sp>
         <p:nvSpPr>
           <p:cNvPr id="49" name="Google Shape;49;p12"/>
-          <p:cNvSpPr txBox="1"/>
+          <p:cNvSpPr txBox="1">
+            <a:spLocks noGrp="1"/>
+          </p:cNvSpPr>
           <p:nvPr>
-            <p:ph idx="12" type="sldNum"/>
+            <p:ph type="sldNum" idx="12"/>
           </p:nvPr>
         </p:nvSpPr>
         <p:spPr>
@@ -1764,7 +1843,7 @@
           </a:prstGeom>
         </p:spPr>
         <p:txBody>
-          <a:bodyPr anchorCtr="0" anchor="ctr" bIns="91425" lIns="91425" spcFirstLastPara="1" rIns="91425" wrap="square" tIns="91425">
+          <a:bodyPr spcFirstLastPara="1" wrap="square" lIns="91425" tIns="91425" rIns="91425" bIns="91425" anchor="ctr" anchorCtr="0">
             <a:normAutofit/>
           </a:bodyPr>
           <a:lstStyle>
@@ -1806,7 +1885,7 @@
             </a:lvl9pPr>
           </a:lstStyle>
           <a:p>
-            <a:pPr indent="0" lvl="0" marL="0" rtl="0" algn="r">
+            <a:pPr marL="0" lvl="0" indent="0" algn="r" rtl="0">
               <a:spcBef>
                 <a:spcPts val="0"/>
               </a:spcBef>
@@ -1832,11 +1911,11 @@
 </file>
 
 <file path=ppt/slideLayouts/slideLayout2.xml><?xml version="1.0" encoding="utf-8"?>
-<p:sldLayout xmlns:a="http://schemas.openxmlformats.org/drawingml/2006/main" xmlns:r="http://schemas.openxmlformats.org/officeDocument/2006/relationships" xmlns:mc="http://schemas.openxmlformats.org/markup-compatibility/2006" xmlns:mv="urn:schemas-microsoft-com:mac:vml" xmlns:p="http://schemas.openxmlformats.org/presentationml/2006/main" xmlns:c="http://schemas.openxmlformats.org/drawingml/2006/chart" xmlns:dgm="http://schemas.openxmlformats.org/drawingml/2006/diagram" xmlns:o="urn:schemas-microsoft-com:office:office" xmlns:v="urn:schemas-microsoft-com:vml" xmlns:pvml="urn:schemas-microsoft-com:office:powerpoint" xmlns:com="http://schemas.openxmlformats.org/drawingml/2006/compatibility" xmlns:p14="http://schemas.microsoft.com/office/powerpoint/2010/main" xmlns:p15="http://schemas.microsoft.com/office/powerpoint/2012/main" xmlns:ahyp="http://schemas.microsoft.com/office/drawing/2018/hyperlinkcolor" matchingName="Section header" type="secHead">
+<p:sldLayout xmlns:a="http://schemas.openxmlformats.org/drawingml/2006/main" xmlns:r="http://schemas.openxmlformats.org/officeDocument/2006/relationships" xmlns:p="http://schemas.openxmlformats.org/presentationml/2006/main" matchingName="Section header" type="secHead">
   <p:cSld name="SECTION_HEADER">
     <p:spTree>
       <p:nvGrpSpPr>
-        <p:cNvPr id="13" name="Shape 13"/>
+        <p:cNvPr id="1" name="Shape 13"/>
         <p:cNvGrpSpPr/>
         <p:nvPr/>
       </p:nvGrpSpPr>
@@ -1851,7 +1930,9 @@
       <p:sp>
         <p:nvSpPr>
           <p:cNvPr id="14" name="Google Shape;14;p3"/>
-          <p:cNvSpPr txBox="1"/>
+          <p:cNvSpPr txBox="1">
+            <a:spLocks noGrp="1"/>
+          </p:cNvSpPr>
           <p:nvPr>
             <p:ph type="title"/>
           </p:nvPr>
@@ -1866,7 +1947,7 @@
           </a:prstGeom>
         </p:spPr>
         <p:txBody>
-          <a:bodyPr anchorCtr="0" anchor="ctr" bIns="91425" lIns="91425" spcFirstLastPara="1" rIns="91425" wrap="square" tIns="91425">
+          <a:bodyPr spcFirstLastPara="1" wrap="square" lIns="91425" tIns="91425" rIns="91425" bIns="91425" anchor="ctr" anchorCtr="0">
             <a:normAutofit/>
           </a:bodyPr>
           <a:lstStyle>
@@ -1970,15 +2051,19 @@
               <a:defRPr sz="3600"/>
             </a:lvl9pPr>
           </a:lstStyle>
-          <a:p/>
+          <a:p>
+            <a:endParaRPr/>
+          </a:p>
         </p:txBody>
       </p:sp>
       <p:sp>
         <p:nvSpPr>
           <p:cNvPr id="15" name="Google Shape;15;p3"/>
-          <p:cNvSpPr txBox="1"/>
+          <p:cNvSpPr txBox="1">
+            <a:spLocks noGrp="1"/>
+          </p:cNvSpPr>
           <p:nvPr>
-            <p:ph idx="12" type="sldNum"/>
+            <p:ph type="sldNum" idx="12"/>
           </p:nvPr>
         </p:nvSpPr>
         <p:spPr>
@@ -1991,7 +2076,7 @@
           </a:prstGeom>
         </p:spPr>
         <p:txBody>
-          <a:bodyPr anchorCtr="0" anchor="ctr" bIns="91425" lIns="91425" spcFirstLastPara="1" rIns="91425" wrap="square" tIns="91425">
+          <a:bodyPr spcFirstLastPara="1" wrap="square" lIns="91425" tIns="91425" rIns="91425" bIns="91425" anchor="ctr" anchorCtr="0">
             <a:normAutofit/>
           </a:bodyPr>
           <a:lstStyle>
@@ -2033,7 +2118,7 @@
             </a:lvl9pPr>
           </a:lstStyle>
           <a:p>
-            <a:pPr indent="0" lvl="0" marL="0" rtl="0" algn="r">
+            <a:pPr marL="0" lvl="0" indent="0" algn="r" rtl="0">
               <a:spcBef>
                 <a:spcPts val="0"/>
               </a:spcBef>
@@ -2059,11 +2144,11 @@
 </file>
 
 <file path=ppt/slideLayouts/slideLayout3.xml><?xml version="1.0" encoding="utf-8"?>
-<p:sldLayout xmlns:a="http://schemas.openxmlformats.org/drawingml/2006/main" xmlns:r="http://schemas.openxmlformats.org/officeDocument/2006/relationships" xmlns:mc="http://schemas.openxmlformats.org/markup-compatibility/2006" xmlns:mv="urn:schemas-microsoft-com:mac:vml" xmlns:p="http://schemas.openxmlformats.org/presentationml/2006/main" xmlns:c="http://schemas.openxmlformats.org/drawingml/2006/chart" xmlns:dgm="http://schemas.openxmlformats.org/drawingml/2006/diagram" xmlns:o="urn:schemas-microsoft-com:office:office" xmlns:v="urn:schemas-microsoft-com:vml" xmlns:pvml="urn:schemas-microsoft-com:office:powerpoint" xmlns:com="http://schemas.openxmlformats.org/drawingml/2006/compatibility" xmlns:p14="http://schemas.microsoft.com/office/powerpoint/2010/main" xmlns:p15="http://schemas.microsoft.com/office/powerpoint/2012/main" xmlns:ahyp="http://schemas.microsoft.com/office/drawing/2018/hyperlinkcolor" matchingName="Title and body" type="tx">
+<p:sldLayout xmlns:a="http://schemas.openxmlformats.org/drawingml/2006/main" xmlns:r="http://schemas.openxmlformats.org/officeDocument/2006/relationships" xmlns:p="http://schemas.openxmlformats.org/presentationml/2006/main" matchingName="Title and body" type="tx">
   <p:cSld name="TITLE_AND_BODY">
     <p:spTree>
       <p:nvGrpSpPr>
-        <p:cNvPr id="16" name="Shape 16"/>
+        <p:cNvPr id="1" name="Shape 16"/>
         <p:cNvGrpSpPr/>
         <p:nvPr/>
       </p:nvGrpSpPr>
@@ -2078,7 +2163,9 @@
       <p:sp>
         <p:nvSpPr>
           <p:cNvPr id="17" name="Google Shape;17;p4"/>
-          <p:cNvSpPr txBox="1"/>
+          <p:cNvSpPr txBox="1">
+            <a:spLocks noGrp="1"/>
+          </p:cNvSpPr>
           <p:nvPr>
             <p:ph type="title"/>
           </p:nvPr>
@@ -2093,7 +2180,7 @@
           </a:prstGeom>
         </p:spPr>
         <p:txBody>
-          <a:bodyPr anchorCtr="0" anchor="t" bIns="91425" lIns="91425" spcFirstLastPara="1" rIns="91425" wrap="square" tIns="91425">
+          <a:bodyPr spcFirstLastPara="1" wrap="square" lIns="91425" tIns="91425" rIns="91425" bIns="91425" anchor="t" anchorCtr="0">
             <a:normAutofit/>
           </a:bodyPr>
           <a:lstStyle>
@@ -2197,15 +2284,19 @@
               <a:defRPr/>
             </a:lvl9pPr>
           </a:lstStyle>
-          <a:p/>
+          <a:p>
+            <a:endParaRPr/>
+          </a:p>
         </p:txBody>
       </p:sp>
       <p:sp>
         <p:nvSpPr>
           <p:cNvPr id="18" name="Google Shape;18;p4"/>
-          <p:cNvSpPr txBox="1"/>
+          <p:cNvSpPr txBox="1">
+            <a:spLocks noGrp="1"/>
+          </p:cNvSpPr>
           <p:nvPr>
-            <p:ph idx="1" type="body"/>
+            <p:ph type="body" idx="1"/>
           </p:nvPr>
         </p:nvSpPr>
         <p:spPr>
@@ -2218,11 +2309,11 @@
           </a:prstGeom>
         </p:spPr>
         <p:txBody>
-          <a:bodyPr anchorCtr="0" anchor="t" bIns="91425" lIns="91425" spcFirstLastPara="1" rIns="91425" wrap="square" tIns="91425">
+          <a:bodyPr spcFirstLastPara="1" wrap="square" lIns="91425" tIns="91425" rIns="91425" bIns="91425" anchor="t" anchorCtr="0">
             <a:normAutofit/>
           </a:bodyPr>
           <a:lstStyle>
-            <a:lvl1pPr indent="-342900" lvl="0" marL="457200">
+            <a:lvl1pPr marL="457200" lvl="0" indent="-342900">
               <a:spcBef>
                 <a:spcPts val="0"/>
               </a:spcBef>
@@ -2233,7 +2324,7 @@
               <a:buChar char="●"/>
               <a:defRPr/>
             </a:lvl1pPr>
-            <a:lvl2pPr indent="-317500" lvl="1" marL="914400">
+            <a:lvl2pPr marL="914400" lvl="1" indent="-317500">
               <a:spcBef>
                 <a:spcPts val="0"/>
               </a:spcBef>
@@ -2244,7 +2335,7 @@
               <a:buChar char="○"/>
               <a:defRPr/>
             </a:lvl2pPr>
-            <a:lvl3pPr indent="-317500" lvl="2" marL="1371600">
+            <a:lvl3pPr marL="1371600" lvl="2" indent="-317500">
               <a:spcBef>
                 <a:spcPts val="0"/>
               </a:spcBef>
@@ -2255,7 +2346,7 @@
               <a:buChar char="■"/>
               <a:defRPr/>
             </a:lvl3pPr>
-            <a:lvl4pPr indent="-317500" lvl="3" marL="1828800">
+            <a:lvl4pPr marL="1828800" lvl="3" indent="-317500">
               <a:spcBef>
                 <a:spcPts val="0"/>
               </a:spcBef>
@@ -2266,7 +2357,7 @@
               <a:buChar char="●"/>
               <a:defRPr/>
             </a:lvl4pPr>
-            <a:lvl5pPr indent="-317500" lvl="4" marL="2286000">
+            <a:lvl5pPr marL="2286000" lvl="4" indent="-317500">
               <a:spcBef>
                 <a:spcPts val="0"/>
               </a:spcBef>
@@ -2277,7 +2368,7 @@
               <a:buChar char="○"/>
               <a:defRPr/>
             </a:lvl5pPr>
-            <a:lvl6pPr indent="-317500" lvl="5" marL="2743200">
+            <a:lvl6pPr marL="2743200" lvl="5" indent="-317500">
               <a:spcBef>
                 <a:spcPts val="0"/>
               </a:spcBef>
@@ -2288,7 +2379,7 @@
               <a:buChar char="■"/>
               <a:defRPr/>
             </a:lvl6pPr>
-            <a:lvl7pPr indent="-317500" lvl="6" marL="3200400">
+            <a:lvl7pPr marL="3200400" lvl="6" indent="-317500">
               <a:spcBef>
                 <a:spcPts val="0"/>
               </a:spcBef>
@@ -2299,7 +2390,7 @@
               <a:buChar char="●"/>
               <a:defRPr/>
             </a:lvl7pPr>
-            <a:lvl8pPr indent="-317500" lvl="7" marL="3657600">
+            <a:lvl8pPr marL="3657600" lvl="7" indent="-317500">
               <a:spcBef>
                 <a:spcPts val="0"/>
               </a:spcBef>
@@ -2310,7 +2401,7 @@
               <a:buChar char="○"/>
               <a:defRPr/>
             </a:lvl8pPr>
-            <a:lvl9pPr indent="-317500" lvl="8" marL="4114800">
+            <a:lvl9pPr marL="4114800" lvl="8" indent="-317500">
               <a:spcBef>
                 <a:spcPts val="0"/>
               </a:spcBef>
@@ -2322,15 +2413,19 @@
               <a:defRPr/>
             </a:lvl9pPr>
           </a:lstStyle>
-          <a:p/>
+          <a:p>
+            <a:endParaRPr/>
+          </a:p>
         </p:txBody>
       </p:sp>
       <p:sp>
         <p:nvSpPr>
           <p:cNvPr id="19" name="Google Shape;19;p4"/>
-          <p:cNvSpPr txBox="1"/>
+          <p:cNvSpPr txBox="1">
+            <a:spLocks noGrp="1"/>
+          </p:cNvSpPr>
           <p:nvPr>
-            <p:ph idx="12" type="sldNum"/>
+            <p:ph type="sldNum" idx="12"/>
           </p:nvPr>
         </p:nvSpPr>
         <p:spPr>
@@ -2343,7 +2438,7 @@
           </a:prstGeom>
         </p:spPr>
         <p:txBody>
-          <a:bodyPr anchorCtr="0" anchor="ctr" bIns="91425" lIns="91425" spcFirstLastPara="1" rIns="91425" wrap="square" tIns="91425">
+          <a:bodyPr spcFirstLastPara="1" wrap="square" lIns="91425" tIns="91425" rIns="91425" bIns="91425" anchor="ctr" anchorCtr="0">
             <a:normAutofit/>
           </a:bodyPr>
           <a:lstStyle>
@@ -2385,7 +2480,7 @@
             </a:lvl9pPr>
           </a:lstStyle>
           <a:p>
-            <a:pPr indent="0" lvl="0" marL="0" rtl="0" algn="r">
+            <a:pPr marL="0" lvl="0" indent="0" algn="r" rtl="0">
               <a:spcBef>
                 <a:spcPts val="0"/>
               </a:spcBef>
@@ -2411,11 +2506,11 @@
 </file>
 
 <file path=ppt/slideLayouts/slideLayout4.xml><?xml version="1.0" encoding="utf-8"?>
-<p:sldLayout xmlns:a="http://schemas.openxmlformats.org/drawingml/2006/main" xmlns:r="http://schemas.openxmlformats.org/officeDocument/2006/relationships" xmlns:mc="http://schemas.openxmlformats.org/markup-compatibility/2006" xmlns:mv="urn:schemas-microsoft-com:mac:vml" xmlns:p="http://schemas.openxmlformats.org/presentationml/2006/main" xmlns:c="http://schemas.openxmlformats.org/drawingml/2006/chart" xmlns:dgm="http://schemas.openxmlformats.org/drawingml/2006/diagram" xmlns:o="urn:schemas-microsoft-com:office:office" xmlns:v="urn:schemas-microsoft-com:vml" xmlns:pvml="urn:schemas-microsoft-com:office:powerpoint" xmlns:com="http://schemas.openxmlformats.org/drawingml/2006/compatibility" xmlns:p14="http://schemas.microsoft.com/office/powerpoint/2010/main" xmlns:p15="http://schemas.microsoft.com/office/powerpoint/2012/main" xmlns:ahyp="http://schemas.microsoft.com/office/drawing/2018/hyperlinkcolor" matchingName="Title and two columns" type="twoColTx">
+<p:sldLayout xmlns:a="http://schemas.openxmlformats.org/drawingml/2006/main" xmlns:r="http://schemas.openxmlformats.org/officeDocument/2006/relationships" xmlns:p="http://schemas.openxmlformats.org/presentationml/2006/main" matchingName="Title and two columns" type="twoColTx">
   <p:cSld name="TITLE_AND_TWO_COLUMNS">
     <p:spTree>
       <p:nvGrpSpPr>
-        <p:cNvPr id="20" name="Shape 20"/>
+        <p:cNvPr id="1" name="Shape 20"/>
         <p:cNvGrpSpPr/>
         <p:nvPr/>
       </p:nvGrpSpPr>
@@ -2430,7 +2525,9 @@
       <p:sp>
         <p:nvSpPr>
           <p:cNvPr id="21" name="Google Shape;21;p5"/>
-          <p:cNvSpPr txBox="1"/>
+          <p:cNvSpPr txBox="1">
+            <a:spLocks noGrp="1"/>
+          </p:cNvSpPr>
           <p:nvPr>
             <p:ph type="title"/>
           </p:nvPr>
@@ -2445,7 +2542,7 @@
           </a:prstGeom>
         </p:spPr>
         <p:txBody>
-          <a:bodyPr anchorCtr="0" anchor="t" bIns="91425" lIns="91425" spcFirstLastPara="1" rIns="91425" wrap="square" tIns="91425">
+          <a:bodyPr spcFirstLastPara="1" wrap="square" lIns="91425" tIns="91425" rIns="91425" bIns="91425" anchor="t" anchorCtr="0">
             <a:normAutofit/>
           </a:bodyPr>
           <a:lstStyle>
@@ -2549,15 +2646,19 @@
               <a:defRPr/>
             </a:lvl9pPr>
           </a:lstStyle>
-          <a:p/>
+          <a:p>
+            <a:endParaRPr/>
+          </a:p>
         </p:txBody>
       </p:sp>
       <p:sp>
         <p:nvSpPr>
           <p:cNvPr id="22" name="Google Shape;22;p5"/>
-          <p:cNvSpPr txBox="1"/>
+          <p:cNvSpPr txBox="1">
+            <a:spLocks noGrp="1"/>
+          </p:cNvSpPr>
           <p:nvPr>
-            <p:ph idx="1" type="body"/>
+            <p:ph type="body" idx="1"/>
           </p:nvPr>
         </p:nvSpPr>
         <p:spPr>
@@ -2570,11 +2671,11 @@
           </a:prstGeom>
         </p:spPr>
         <p:txBody>
-          <a:bodyPr anchorCtr="0" anchor="t" bIns="91425" lIns="91425" spcFirstLastPara="1" rIns="91425" wrap="square" tIns="91425">
+          <a:bodyPr spcFirstLastPara="1" wrap="square" lIns="91425" tIns="91425" rIns="91425" bIns="91425" anchor="t" anchorCtr="0">
             <a:normAutofit/>
           </a:bodyPr>
           <a:lstStyle>
-            <a:lvl1pPr indent="-317500" lvl="0" marL="457200">
+            <a:lvl1pPr marL="457200" lvl="0" indent="-317500">
               <a:spcBef>
                 <a:spcPts val="0"/>
               </a:spcBef>
@@ -2585,7 +2686,7 @@
               <a:buChar char="●"/>
               <a:defRPr sz="1400"/>
             </a:lvl1pPr>
-            <a:lvl2pPr indent="-304800" lvl="1" marL="914400">
+            <a:lvl2pPr marL="914400" lvl="1" indent="-304800">
               <a:spcBef>
                 <a:spcPts val="0"/>
               </a:spcBef>
@@ -2596,7 +2697,7 @@
               <a:buChar char="○"/>
               <a:defRPr sz="1200"/>
             </a:lvl2pPr>
-            <a:lvl3pPr indent="-304800" lvl="2" marL="1371600">
+            <a:lvl3pPr marL="1371600" lvl="2" indent="-304800">
               <a:spcBef>
                 <a:spcPts val="0"/>
               </a:spcBef>
@@ -2607,7 +2708,7 @@
               <a:buChar char="■"/>
               <a:defRPr sz="1200"/>
             </a:lvl3pPr>
-            <a:lvl4pPr indent="-304800" lvl="3" marL="1828800">
+            <a:lvl4pPr marL="1828800" lvl="3" indent="-304800">
               <a:spcBef>
                 <a:spcPts val="0"/>
               </a:spcBef>
@@ -2618,7 +2719,7 @@
               <a:buChar char="●"/>
               <a:defRPr sz="1200"/>
             </a:lvl4pPr>
-            <a:lvl5pPr indent="-304800" lvl="4" marL="2286000">
+            <a:lvl5pPr marL="2286000" lvl="4" indent="-304800">
               <a:spcBef>
                 <a:spcPts val="0"/>
               </a:spcBef>
@@ -2629,7 +2730,7 @@
               <a:buChar char="○"/>
               <a:defRPr sz="1200"/>
             </a:lvl5pPr>
-            <a:lvl6pPr indent="-304800" lvl="5" marL="2743200">
+            <a:lvl6pPr marL="2743200" lvl="5" indent="-304800">
               <a:spcBef>
                 <a:spcPts val="0"/>
               </a:spcBef>
@@ -2640,7 +2741,7 @@
               <a:buChar char="■"/>
               <a:defRPr sz="1200"/>
             </a:lvl6pPr>
-            <a:lvl7pPr indent="-304800" lvl="6" marL="3200400">
+            <a:lvl7pPr marL="3200400" lvl="6" indent="-304800">
               <a:spcBef>
                 <a:spcPts val="0"/>
               </a:spcBef>
@@ -2651,7 +2752,7 @@
               <a:buChar char="●"/>
               <a:defRPr sz="1200"/>
             </a:lvl7pPr>
-            <a:lvl8pPr indent="-304800" lvl="7" marL="3657600">
+            <a:lvl8pPr marL="3657600" lvl="7" indent="-304800">
               <a:spcBef>
                 <a:spcPts val="0"/>
               </a:spcBef>
@@ -2662,7 +2763,7 @@
               <a:buChar char="○"/>
               <a:defRPr sz="1200"/>
             </a:lvl8pPr>
-            <a:lvl9pPr indent="-304800" lvl="8" marL="4114800">
+            <a:lvl9pPr marL="4114800" lvl="8" indent="-304800">
               <a:spcBef>
                 <a:spcPts val="0"/>
               </a:spcBef>
@@ -2674,15 +2775,19 @@
               <a:defRPr sz="1200"/>
             </a:lvl9pPr>
           </a:lstStyle>
-          <a:p/>
+          <a:p>
+            <a:endParaRPr/>
+          </a:p>
         </p:txBody>
       </p:sp>
       <p:sp>
         <p:nvSpPr>
           <p:cNvPr id="23" name="Google Shape;23;p5"/>
-          <p:cNvSpPr txBox="1"/>
+          <p:cNvSpPr txBox="1">
+            <a:spLocks noGrp="1"/>
+          </p:cNvSpPr>
           <p:nvPr>
-            <p:ph idx="2" type="body"/>
+            <p:ph type="body" idx="2"/>
           </p:nvPr>
         </p:nvSpPr>
         <p:spPr>
@@ -2695,11 +2800,11 @@
           </a:prstGeom>
         </p:spPr>
         <p:txBody>
-          <a:bodyPr anchorCtr="0" anchor="t" bIns="91425" lIns="91425" spcFirstLastPara="1" rIns="91425" wrap="square" tIns="91425">
+          <a:bodyPr spcFirstLastPara="1" wrap="square" lIns="91425" tIns="91425" rIns="91425" bIns="91425" anchor="t" anchorCtr="0">
             <a:normAutofit/>
           </a:bodyPr>
           <a:lstStyle>
-            <a:lvl1pPr indent="-317500" lvl="0" marL="457200">
+            <a:lvl1pPr marL="457200" lvl="0" indent="-317500">
               <a:spcBef>
                 <a:spcPts val="0"/>
               </a:spcBef>
@@ -2710,7 +2815,7 @@
               <a:buChar char="●"/>
               <a:defRPr sz="1400"/>
             </a:lvl1pPr>
-            <a:lvl2pPr indent="-304800" lvl="1" marL="914400">
+            <a:lvl2pPr marL="914400" lvl="1" indent="-304800">
               <a:spcBef>
                 <a:spcPts val="0"/>
               </a:spcBef>
@@ -2721,7 +2826,7 @@
               <a:buChar char="○"/>
               <a:defRPr sz="1200"/>
             </a:lvl2pPr>
-            <a:lvl3pPr indent="-304800" lvl="2" marL="1371600">
+            <a:lvl3pPr marL="1371600" lvl="2" indent="-304800">
               <a:spcBef>
                 <a:spcPts val="0"/>
               </a:spcBef>
@@ -2732,7 +2837,7 @@
               <a:buChar char="■"/>
               <a:defRPr sz="1200"/>
             </a:lvl3pPr>
-            <a:lvl4pPr indent="-304800" lvl="3" marL="1828800">
+            <a:lvl4pPr marL="1828800" lvl="3" indent="-304800">
               <a:spcBef>
                 <a:spcPts val="0"/>
               </a:spcBef>
@@ -2743,7 +2848,7 @@
               <a:buChar char="●"/>
               <a:defRPr sz="1200"/>
             </a:lvl4pPr>
-            <a:lvl5pPr indent="-304800" lvl="4" marL="2286000">
+            <a:lvl5pPr marL="2286000" lvl="4" indent="-304800">
               <a:spcBef>
                 <a:spcPts val="0"/>
               </a:spcBef>
@@ -2754,7 +2859,7 @@
               <a:buChar char="○"/>
               <a:defRPr sz="1200"/>
             </a:lvl5pPr>
-            <a:lvl6pPr indent="-304800" lvl="5" marL="2743200">
+            <a:lvl6pPr marL="2743200" lvl="5" indent="-304800">
               <a:spcBef>
                 <a:spcPts val="0"/>
               </a:spcBef>
@@ -2765,7 +2870,7 @@
               <a:buChar char="■"/>
               <a:defRPr sz="1200"/>
             </a:lvl6pPr>
-            <a:lvl7pPr indent="-304800" lvl="6" marL="3200400">
+            <a:lvl7pPr marL="3200400" lvl="6" indent="-304800">
               <a:spcBef>
                 <a:spcPts val="0"/>
               </a:spcBef>
@@ -2776,7 +2881,7 @@
               <a:buChar char="●"/>
               <a:defRPr sz="1200"/>
             </a:lvl7pPr>
-            <a:lvl8pPr indent="-304800" lvl="7" marL="3657600">
+            <a:lvl8pPr marL="3657600" lvl="7" indent="-304800">
               <a:spcBef>
                 <a:spcPts val="0"/>
               </a:spcBef>
@@ -2787,7 +2892,7 @@
               <a:buChar char="○"/>
               <a:defRPr sz="1200"/>
             </a:lvl8pPr>
-            <a:lvl9pPr indent="-304800" lvl="8" marL="4114800">
+            <a:lvl9pPr marL="4114800" lvl="8" indent="-304800">
               <a:spcBef>
                 <a:spcPts val="0"/>
               </a:spcBef>
@@ -2799,15 +2904,19 @@
               <a:defRPr sz="1200"/>
             </a:lvl9pPr>
           </a:lstStyle>
-          <a:p/>
+          <a:p>
+            <a:endParaRPr/>
+          </a:p>
         </p:txBody>
       </p:sp>
       <p:sp>
         <p:nvSpPr>
           <p:cNvPr id="24" name="Google Shape;24;p5"/>
-          <p:cNvSpPr txBox="1"/>
+          <p:cNvSpPr txBox="1">
+            <a:spLocks noGrp="1"/>
+          </p:cNvSpPr>
           <p:nvPr>
-            <p:ph idx="12" type="sldNum"/>
+            <p:ph type="sldNum" idx="12"/>
           </p:nvPr>
         </p:nvSpPr>
         <p:spPr>
@@ -2820,7 +2929,7 @@
           </a:prstGeom>
         </p:spPr>
         <p:txBody>
-          <a:bodyPr anchorCtr="0" anchor="ctr" bIns="91425" lIns="91425" spcFirstLastPara="1" rIns="91425" wrap="square" tIns="91425">
+          <a:bodyPr spcFirstLastPara="1" wrap="square" lIns="91425" tIns="91425" rIns="91425" bIns="91425" anchor="ctr" anchorCtr="0">
             <a:normAutofit/>
           </a:bodyPr>
           <a:lstStyle>
@@ -2862,7 +2971,7 @@
             </a:lvl9pPr>
           </a:lstStyle>
           <a:p>
-            <a:pPr indent="0" lvl="0" marL="0" rtl="0" algn="r">
+            <a:pPr marL="0" lvl="0" indent="0" algn="r" rtl="0">
               <a:spcBef>
                 <a:spcPts val="0"/>
               </a:spcBef>
@@ -2888,11 +2997,11 @@
 </file>
 
 <file path=ppt/slideLayouts/slideLayout5.xml><?xml version="1.0" encoding="utf-8"?>
-<p:sldLayout xmlns:a="http://schemas.openxmlformats.org/drawingml/2006/main" xmlns:r="http://schemas.openxmlformats.org/officeDocument/2006/relationships" xmlns:mc="http://schemas.openxmlformats.org/markup-compatibility/2006" xmlns:mv="urn:schemas-microsoft-com:mac:vml" xmlns:p="http://schemas.openxmlformats.org/presentationml/2006/main" xmlns:c="http://schemas.openxmlformats.org/drawingml/2006/chart" xmlns:dgm="http://schemas.openxmlformats.org/drawingml/2006/diagram" xmlns:o="urn:schemas-microsoft-com:office:office" xmlns:v="urn:schemas-microsoft-com:vml" xmlns:pvml="urn:schemas-microsoft-com:office:powerpoint" xmlns:com="http://schemas.openxmlformats.org/drawingml/2006/compatibility" xmlns:p14="http://schemas.microsoft.com/office/powerpoint/2010/main" xmlns:p15="http://schemas.microsoft.com/office/powerpoint/2012/main" xmlns:ahyp="http://schemas.microsoft.com/office/drawing/2018/hyperlinkcolor" matchingName="Title only" type="titleOnly">
+<p:sldLayout xmlns:a="http://schemas.openxmlformats.org/drawingml/2006/main" xmlns:r="http://schemas.openxmlformats.org/officeDocument/2006/relationships" xmlns:p="http://schemas.openxmlformats.org/presentationml/2006/main" matchingName="Title only" type="titleOnly">
   <p:cSld name="TITLE_ONLY">
     <p:spTree>
       <p:nvGrpSpPr>
-        <p:cNvPr id="25" name="Shape 25"/>
+        <p:cNvPr id="1" name="Shape 25"/>
         <p:cNvGrpSpPr/>
         <p:nvPr/>
       </p:nvGrpSpPr>
@@ -2907,7 +3016,9 @@
       <p:sp>
         <p:nvSpPr>
           <p:cNvPr id="26" name="Google Shape;26;p6"/>
-          <p:cNvSpPr txBox="1"/>
+          <p:cNvSpPr txBox="1">
+            <a:spLocks noGrp="1"/>
+          </p:cNvSpPr>
           <p:nvPr>
             <p:ph type="title"/>
           </p:nvPr>
@@ -2922,7 +3033,7 @@
           </a:prstGeom>
         </p:spPr>
         <p:txBody>
-          <a:bodyPr anchorCtr="0" anchor="t" bIns="91425" lIns="91425" spcFirstLastPara="1" rIns="91425" wrap="square" tIns="91425">
+          <a:bodyPr spcFirstLastPara="1" wrap="square" lIns="91425" tIns="91425" rIns="91425" bIns="91425" anchor="t" anchorCtr="0">
             <a:normAutofit/>
           </a:bodyPr>
           <a:lstStyle>
@@ -3026,15 +3137,19 @@
               <a:defRPr/>
             </a:lvl9pPr>
           </a:lstStyle>
-          <a:p/>
+          <a:p>
+            <a:endParaRPr/>
+          </a:p>
         </p:txBody>
       </p:sp>
       <p:sp>
         <p:nvSpPr>
           <p:cNvPr id="27" name="Google Shape;27;p6"/>
-          <p:cNvSpPr txBox="1"/>
+          <p:cNvSpPr txBox="1">
+            <a:spLocks noGrp="1"/>
+          </p:cNvSpPr>
           <p:nvPr>
-            <p:ph idx="12" type="sldNum"/>
+            <p:ph type="sldNum" idx="12"/>
           </p:nvPr>
         </p:nvSpPr>
         <p:spPr>
@@ -3047,7 +3162,7 @@
           </a:prstGeom>
         </p:spPr>
         <p:txBody>
-          <a:bodyPr anchorCtr="0" anchor="ctr" bIns="91425" lIns="91425" spcFirstLastPara="1" rIns="91425" wrap="square" tIns="91425">
+          <a:bodyPr spcFirstLastPara="1" wrap="square" lIns="91425" tIns="91425" rIns="91425" bIns="91425" anchor="ctr" anchorCtr="0">
             <a:normAutofit/>
           </a:bodyPr>
           <a:lstStyle>
@@ -3089,7 +3204,7 @@
             </a:lvl9pPr>
           </a:lstStyle>
           <a:p>
-            <a:pPr indent="0" lvl="0" marL="0" rtl="0" algn="r">
+            <a:pPr marL="0" lvl="0" indent="0" algn="r" rtl="0">
               <a:spcBef>
                 <a:spcPts val="0"/>
               </a:spcBef>
@@ -3115,11 +3230,11 @@
 </file>
 
 <file path=ppt/slideLayouts/slideLayout6.xml><?xml version="1.0" encoding="utf-8"?>
-<p:sldLayout xmlns:a="http://schemas.openxmlformats.org/drawingml/2006/main" xmlns:r="http://schemas.openxmlformats.org/officeDocument/2006/relationships" xmlns:mc="http://schemas.openxmlformats.org/markup-compatibility/2006" xmlns:mv="urn:schemas-microsoft-com:mac:vml" xmlns:p="http://schemas.openxmlformats.org/presentationml/2006/main" xmlns:c="http://schemas.openxmlformats.org/drawingml/2006/chart" xmlns:dgm="http://schemas.openxmlformats.org/drawingml/2006/diagram" xmlns:o="urn:schemas-microsoft-com:office:office" xmlns:v="urn:schemas-microsoft-com:vml" xmlns:pvml="urn:schemas-microsoft-com:office:powerpoint" xmlns:com="http://schemas.openxmlformats.org/drawingml/2006/compatibility" xmlns:p14="http://schemas.microsoft.com/office/powerpoint/2010/main" xmlns:p15="http://schemas.microsoft.com/office/powerpoint/2012/main" xmlns:ahyp="http://schemas.microsoft.com/office/drawing/2018/hyperlinkcolor" matchingName="One column text">
+<p:sldLayout xmlns:a="http://schemas.openxmlformats.org/drawingml/2006/main" xmlns:r="http://schemas.openxmlformats.org/officeDocument/2006/relationships" xmlns:p="http://schemas.openxmlformats.org/presentationml/2006/main" matchingName="One column text">
   <p:cSld name="ONE_COLUMN_TEXT">
     <p:spTree>
       <p:nvGrpSpPr>
-        <p:cNvPr id="28" name="Shape 28"/>
+        <p:cNvPr id="1" name="Shape 28"/>
         <p:cNvGrpSpPr/>
         <p:nvPr/>
       </p:nvGrpSpPr>
@@ -3134,7 +3249,9 @@
       <p:sp>
         <p:nvSpPr>
           <p:cNvPr id="29" name="Google Shape;29;p7"/>
-          <p:cNvSpPr txBox="1"/>
+          <p:cNvSpPr txBox="1">
+            <a:spLocks noGrp="1"/>
+          </p:cNvSpPr>
           <p:nvPr>
             <p:ph type="title"/>
           </p:nvPr>
@@ -3149,7 +3266,7 @@
           </a:prstGeom>
         </p:spPr>
         <p:txBody>
-          <a:bodyPr anchorCtr="0" anchor="b" bIns="91425" lIns="91425" spcFirstLastPara="1" rIns="91425" wrap="square" tIns="91425">
+          <a:bodyPr spcFirstLastPara="1" wrap="square" lIns="91425" tIns="91425" rIns="91425" bIns="91425" anchor="b" anchorCtr="0">
             <a:normAutofit/>
           </a:bodyPr>
           <a:lstStyle>
@@ -3253,15 +3370,19 @@
               <a:defRPr sz="2400"/>
             </a:lvl9pPr>
           </a:lstStyle>
-          <a:p/>
+          <a:p>
+            <a:endParaRPr/>
+          </a:p>
         </p:txBody>
       </p:sp>
       <p:sp>
         <p:nvSpPr>
           <p:cNvPr id="30" name="Google Shape;30;p7"/>
-          <p:cNvSpPr txBox="1"/>
+          <p:cNvSpPr txBox="1">
+            <a:spLocks noGrp="1"/>
+          </p:cNvSpPr>
           <p:nvPr>
-            <p:ph idx="1" type="body"/>
+            <p:ph type="body" idx="1"/>
           </p:nvPr>
         </p:nvSpPr>
         <p:spPr>
@@ -3274,11 +3395,11 @@
           </a:prstGeom>
         </p:spPr>
         <p:txBody>
-          <a:bodyPr anchorCtr="0" anchor="t" bIns="91425" lIns="91425" spcFirstLastPara="1" rIns="91425" wrap="square" tIns="91425">
+          <a:bodyPr spcFirstLastPara="1" wrap="square" lIns="91425" tIns="91425" rIns="91425" bIns="91425" anchor="t" anchorCtr="0">
             <a:normAutofit/>
           </a:bodyPr>
           <a:lstStyle>
-            <a:lvl1pPr indent="-304800" lvl="0" marL="457200">
+            <a:lvl1pPr marL="457200" lvl="0" indent="-304800">
               <a:spcBef>
                 <a:spcPts val="0"/>
               </a:spcBef>
@@ -3289,7 +3410,7 @@
               <a:buChar char="●"/>
               <a:defRPr sz="1200"/>
             </a:lvl1pPr>
-            <a:lvl2pPr indent="-304800" lvl="1" marL="914400">
+            <a:lvl2pPr marL="914400" lvl="1" indent="-304800">
               <a:spcBef>
                 <a:spcPts val="0"/>
               </a:spcBef>
@@ -3300,7 +3421,7 @@
               <a:buChar char="○"/>
               <a:defRPr sz="1200"/>
             </a:lvl2pPr>
-            <a:lvl3pPr indent="-304800" lvl="2" marL="1371600">
+            <a:lvl3pPr marL="1371600" lvl="2" indent="-304800">
               <a:spcBef>
                 <a:spcPts val="0"/>
               </a:spcBef>
@@ -3311,7 +3432,7 @@
               <a:buChar char="■"/>
               <a:defRPr sz="1200"/>
             </a:lvl3pPr>
-            <a:lvl4pPr indent="-304800" lvl="3" marL="1828800">
+            <a:lvl4pPr marL="1828800" lvl="3" indent="-304800">
               <a:spcBef>
                 <a:spcPts val="0"/>
               </a:spcBef>
@@ -3322,7 +3443,7 @@
               <a:buChar char="●"/>
               <a:defRPr sz="1200"/>
             </a:lvl4pPr>
-            <a:lvl5pPr indent="-304800" lvl="4" marL="2286000">
+            <a:lvl5pPr marL="2286000" lvl="4" indent="-304800">
               <a:spcBef>
                 <a:spcPts val="0"/>
               </a:spcBef>
@@ -3333,7 +3454,7 @@
               <a:buChar char="○"/>
               <a:defRPr sz="1200"/>
             </a:lvl5pPr>
-            <a:lvl6pPr indent="-304800" lvl="5" marL="2743200">
+            <a:lvl6pPr marL="2743200" lvl="5" indent="-304800">
               <a:spcBef>
                 <a:spcPts val="0"/>
               </a:spcBef>
@@ -3344,7 +3465,7 @@
               <a:buChar char="■"/>
               <a:defRPr sz="1200"/>
             </a:lvl6pPr>
-            <a:lvl7pPr indent="-304800" lvl="6" marL="3200400">
+            <a:lvl7pPr marL="3200400" lvl="6" indent="-304800">
               <a:spcBef>
                 <a:spcPts val="0"/>
               </a:spcBef>
@@ -3355,7 +3476,7 @@
               <a:buChar char="●"/>
               <a:defRPr sz="1200"/>
             </a:lvl7pPr>
-            <a:lvl8pPr indent="-304800" lvl="7" marL="3657600">
+            <a:lvl8pPr marL="3657600" lvl="7" indent="-304800">
               <a:spcBef>
                 <a:spcPts val="0"/>
               </a:spcBef>
@@ -3366,7 +3487,7 @@
               <a:buChar char="○"/>
               <a:defRPr sz="1200"/>
             </a:lvl8pPr>
-            <a:lvl9pPr indent="-304800" lvl="8" marL="4114800">
+            <a:lvl9pPr marL="4114800" lvl="8" indent="-304800">
               <a:spcBef>
                 <a:spcPts val="0"/>
               </a:spcBef>
@@ -3378,15 +3499,19 @@
               <a:defRPr sz="1200"/>
             </a:lvl9pPr>
           </a:lstStyle>
-          <a:p/>
+          <a:p>
+            <a:endParaRPr/>
+          </a:p>
         </p:txBody>
       </p:sp>
       <p:sp>
         <p:nvSpPr>
           <p:cNvPr id="31" name="Google Shape;31;p7"/>
-          <p:cNvSpPr txBox="1"/>
+          <p:cNvSpPr txBox="1">
+            <a:spLocks noGrp="1"/>
+          </p:cNvSpPr>
           <p:nvPr>
-            <p:ph idx="12" type="sldNum"/>
+            <p:ph type="sldNum" idx="12"/>
           </p:nvPr>
         </p:nvSpPr>
         <p:spPr>
@@ -3399,7 +3524,7 @@
           </a:prstGeom>
         </p:spPr>
         <p:txBody>
-          <a:bodyPr anchorCtr="0" anchor="ctr" bIns="91425" lIns="91425" spcFirstLastPara="1" rIns="91425" wrap="square" tIns="91425">
+          <a:bodyPr spcFirstLastPara="1" wrap="square" lIns="91425" tIns="91425" rIns="91425" bIns="91425" anchor="ctr" anchorCtr="0">
             <a:normAutofit/>
           </a:bodyPr>
           <a:lstStyle>
@@ -3441,7 +3566,7 @@
             </a:lvl9pPr>
           </a:lstStyle>
           <a:p>
-            <a:pPr indent="0" lvl="0" marL="0" rtl="0" algn="r">
+            <a:pPr marL="0" lvl="0" indent="0" algn="r" rtl="0">
               <a:spcBef>
                 <a:spcPts val="0"/>
               </a:spcBef>
@@ -3467,11 +3592,11 @@
 </file>
 
 <file path=ppt/slideLayouts/slideLayout7.xml><?xml version="1.0" encoding="utf-8"?>
-<p:sldLayout xmlns:a="http://schemas.openxmlformats.org/drawingml/2006/main" xmlns:r="http://schemas.openxmlformats.org/officeDocument/2006/relationships" xmlns:mc="http://schemas.openxmlformats.org/markup-compatibility/2006" xmlns:mv="urn:schemas-microsoft-com:mac:vml" xmlns:p="http://schemas.openxmlformats.org/presentationml/2006/main" xmlns:c="http://schemas.openxmlformats.org/drawingml/2006/chart" xmlns:dgm="http://schemas.openxmlformats.org/drawingml/2006/diagram" xmlns:o="urn:schemas-microsoft-com:office:office" xmlns:v="urn:schemas-microsoft-com:vml" xmlns:pvml="urn:schemas-microsoft-com:office:powerpoint" xmlns:com="http://schemas.openxmlformats.org/drawingml/2006/compatibility" xmlns:p14="http://schemas.microsoft.com/office/powerpoint/2010/main" xmlns:p15="http://schemas.microsoft.com/office/powerpoint/2012/main" xmlns:ahyp="http://schemas.microsoft.com/office/drawing/2018/hyperlinkcolor" matchingName="Main point">
+<p:sldLayout xmlns:a="http://schemas.openxmlformats.org/drawingml/2006/main" xmlns:r="http://schemas.openxmlformats.org/officeDocument/2006/relationships" xmlns:p="http://schemas.openxmlformats.org/presentationml/2006/main" matchingName="Main point">
   <p:cSld name="MAIN_POINT">
     <p:spTree>
       <p:nvGrpSpPr>
-        <p:cNvPr id="32" name="Shape 32"/>
+        <p:cNvPr id="1" name="Shape 32"/>
         <p:cNvGrpSpPr/>
         <p:nvPr/>
       </p:nvGrpSpPr>
@@ -3486,7 +3611,9 @@
       <p:sp>
         <p:nvSpPr>
           <p:cNvPr id="33" name="Google Shape;33;p8"/>
-          <p:cNvSpPr txBox="1"/>
+          <p:cNvSpPr txBox="1">
+            <a:spLocks noGrp="1"/>
+          </p:cNvSpPr>
           <p:nvPr>
             <p:ph type="title"/>
           </p:nvPr>
@@ -3501,7 +3628,7 @@
           </a:prstGeom>
         </p:spPr>
         <p:txBody>
-          <a:bodyPr anchorCtr="0" anchor="ctr" bIns="91425" lIns="91425" spcFirstLastPara="1" rIns="91425" wrap="square" tIns="91425">
+          <a:bodyPr spcFirstLastPara="1" wrap="square" lIns="91425" tIns="91425" rIns="91425" bIns="91425" anchor="ctr" anchorCtr="0">
             <a:normAutofit/>
           </a:bodyPr>
           <a:lstStyle>
@@ -3605,15 +3732,19 @@
               <a:defRPr sz="4800"/>
             </a:lvl9pPr>
           </a:lstStyle>
-          <a:p/>
+          <a:p>
+            <a:endParaRPr/>
+          </a:p>
         </p:txBody>
       </p:sp>
       <p:sp>
         <p:nvSpPr>
           <p:cNvPr id="34" name="Google Shape;34;p8"/>
-          <p:cNvSpPr txBox="1"/>
+          <p:cNvSpPr txBox="1">
+            <a:spLocks noGrp="1"/>
+          </p:cNvSpPr>
           <p:nvPr>
-            <p:ph idx="12" type="sldNum"/>
+            <p:ph type="sldNum" idx="12"/>
           </p:nvPr>
         </p:nvSpPr>
         <p:spPr>
@@ -3626,7 +3757,7 @@
           </a:prstGeom>
         </p:spPr>
         <p:txBody>
-          <a:bodyPr anchorCtr="0" anchor="ctr" bIns="91425" lIns="91425" spcFirstLastPara="1" rIns="91425" wrap="square" tIns="91425">
+          <a:bodyPr spcFirstLastPara="1" wrap="square" lIns="91425" tIns="91425" rIns="91425" bIns="91425" anchor="ctr" anchorCtr="0">
             <a:normAutofit/>
           </a:bodyPr>
           <a:lstStyle>
@@ -3668,7 +3799,7 @@
             </a:lvl9pPr>
           </a:lstStyle>
           <a:p>
-            <a:pPr indent="0" lvl="0" marL="0" rtl="0" algn="r">
+            <a:pPr marL="0" lvl="0" indent="0" algn="r" rtl="0">
               <a:spcBef>
                 <a:spcPts val="0"/>
               </a:spcBef>
@@ -3694,11 +3825,11 @@
 </file>
 
 <file path=ppt/slideLayouts/slideLayout8.xml><?xml version="1.0" encoding="utf-8"?>
-<p:sldLayout xmlns:a="http://schemas.openxmlformats.org/drawingml/2006/main" xmlns:r="http://schemas.openxmlformats.org/officeDocument/2006/relationships" xmlns:mc="http://schemas.openxmlformats.org/markup-compatibility/2006" xmlns:mv="urn:schemas-microsoft-com:mac:vml" xmlns:p="http://schemas.openxmlformats.org/presentationml/2006/main" xmlns:c="http://schemas.openxmlformats.org/drawingml/2006/chart" xmlns:dgm="http://schemas.openxmlformats.org/drawingml/2006/diagram" xmlns:o="urn:schemas-microsoft-com:office:office" xmlns:v="urn:schemas-microsoft-com:vml" xmlns:pvml="urn:schemas-microsoft-com:office:powerpoint" xmlns:com="http://schemas.openxmlformats.org/drawingml/2006/compatibility" xmlns:p14="http://schemas.microsoft.com/office/powerpoint/2010/main" xmlns:p15="http://schemas.microsoft.com/office/powerpoint/2012/main" xmlns:ahyp="http://schemas.microsoft.com/office/drawing/2018/hyperlinkcolor" matchingName="Section title and description">
+<p:sldLayout xmlns:a="http://schemas.openxmlformats.org/drawingml/2006/main" xmlns:r="http://schemas.openxmlformats.org/officeDocument/2006/relationships" xmlns:p="http://schemas.openxmlformats.org/presentationml/2006/main" matchingName="Section title and description">
   <p:cSld name="SECTION_TITLE_AND_DESCRIPTION">
     <p:spTree>
       <p:nvGrpSpPr>
-        <p:cNvPr id="35" name="Shape 35"/>
+        <p:cNvPr id="1" name="Shape 35"/>
         <p:cNvGrpSpPr/>
         <p:nvPr/>
       </p:nvGrpSpPr>
@@ -3732,12 +3863,12 @@
           </a:ln>
         </p:spPr>
         <p:txBody>
-          <a:bodyPr anchorCtr="0" anchor="ctr" bIns="91425" lIns="91425" spcFirstLastPara="1" rIns="91425" wrap="square" tIns="91425">
+          <a:bodyPr spcFirstLastPara="1" wrap="square" lIns="91425" tIns="91425" rIns="91425" bIns="91425" anchor="ctr" anchorCtr="0">
             <a:noAutofit/>
           </a:bodyPr>
           <a:lstStyle/>
           <a:p>
-            <a:pPr indent="0" lvl="0" marL="0" rtl="0" algn="l">
+            <a:pPr marL="0" lvl="0" indent="0" algn="l" rtl="0">
               <a:spcBef>
                 <a:spcPts val="0"/>
               </a:spcBef>
@@ -3746,9 +3877,6 @@
               </a:spcAft>
               <a:buNone/>
             </a:pPr>
-            <a:r>
-              <a:t/>
-            </a:r>
             <a:endParaRPr/>
           </a:p>
         </p:txBody>
@@ -3756,7 +3884,9 @@
       <p:sp>
         <p:nvSpPr>
           <p:cNvPr id="37" name="Google Shape;37;p9"/>
-          <p:cNvSpPr txBox="1"/>
+          <p:cNvSpPr txBox="1">
+            <a:spLocks noGrp="1"/>
+          </p:cNvSpPr>
           <p:nvPr>
             <p:ph type="title"/>
           </p:nvPr>
@@ -3771,7 +3901,7 @@
           </a:prstGeom>
         </p:spPr>
         <p:txBody>
-          <a:bodyPr anchorCtr="0" anchor="b" bIns="91425" lIns="91425" spcFirstLastPara="1" rIns="91425" wrap="square" tIns="91425">
+          <a:bodyPr spcFirstLastPara="1" wrap="square" lIns="91425" tIns="91425" rIns="91425" bIns="91425" anchor="b" anchorCtr="0">
             <a:normAutofit/>
           </a:bodyPr>
           <a:lstStyle>
@@ -3875,15 +4005,19 @@
               <a:defRPr sz="4200"/>
             </a:lvl9pPr>
           </a:lstStyle>
-          <a:p/>
+          <a:p>
+            <a:endParaRPr/>
+          </a:p>
         </p:txBody>
       </p:sp>
       <p:sp>
         <p:nvSpPr>
           <p:cNvPr id="38" name="Google Shape;38;p9"/>
-          <p:cNvSpPr txBox="1"/>
+          <p:cNvSpPr txBox="1">
+            <a:spLocks noGrp="1"/>
+          </p:cNvSpPr>
           <p:nvPr>
-            <p:ph idx="1" type="subTitle"/>
+            <p:ph type="subTitle" idx="1"/>
           </p:nvPr>
         </p:nvSpPr>
         <p:spPr>
@@ -3896,7 +4030,7 @@
           </a:prstGeom>
         </p:spPr>
         <p:txBody>
-          <a:bodyPr anchorCtr="0" anchor="t" bIns="91425" lIns="91425" spcFirstLastPara="1" rIns="91425" wrap="square" tIns="91425">
+          <a:bodyPr spcFirstLastPara="1" wrap="square" lIns="91425" tIns="91425" rIns="91425" bIns="91425" anchor="t" anchorCtr="0">
             <a:normAutofit/>
           </a:bodyPr>
           <a:lstStyle>
@@ -4027,15 +4161,19 @@
               <a:defRPr sz="2100"/>
             </a:lvl9pPr>
           </a:lstStyle>
-          <a:p/>
+          <a:p>
+            <a:endParaRPr/>
+          </a:p>
         </p:txBody>
       </p:sp>
       <p:sp>
         <p:nvSpPr>
           <p:cNvPr id="39" name="Google Shape;39;p9"/>
-          <p:cNvSpPr txBox="1"/>
+          <p:cNvSpPr txBox="1">
+            <a:spLocks noGrp="1"/>
+          </p:cNvSpPr>
           <p:nvPr>
-            <p:ph idx="2" type="body"/>
+            <p:ph type="body" idx="2"/>
           </p:nvPr>
         </p:nvSpPr>
         <p:spPr>
@@ -4048,11 +4186,11 @@
           </a:prstGeom>
         </p:spPr>
         <p:txBody>
-          <a:bodyPr anchorCtr="0" anchor="ctr" bIns="91425" lIns="91425" spcFirstLastPara="1" rIns="91425" wrap="square" tIns="91425">
+          <a:bodyPr spcFirstLastPara="1" wrap="square" lIns="91425" tIns="91425" rIns="91425" bIns="91425" anchor="ctr" anchorCtr="0">
             <a:normAutofit/>
           </a:bodyPr>
           <a:lstStyle>
-            <a:lvl1pPr indent="-342900" lvl="0" marL="457200">
+            <a:lvl1pPr marL="457200" lvl="0" indent="-342900">
               <a:spcBef>
                 <a:spcPts val="0"/>
               </a:spcBef>
@@ -4063,7 +4201,7 @@
               <a:buChar char="●"/>
               <a:defRPr/>
             </a:lvl1pPr>
-            <a:lvl2pPr indent="-317500" lvl="1" marL="914400">
+            <a:lvl2pPr marL="914400" lvl="1" indent="-317500">
               <a:spcBef>
                 <a:spcPts val="0"/>
               </a:spcBef>
@@ -4074,7 +4212,7 @@
               <a:buChar char="○"/>
               <a:defRPr/>
             </a:lvl2pPr>
-            <a:lvl3pPr indent="-317500" lvl="2" marL="1371600">
+            <a:lvl3pPr marL="1371600" lvl="2" indent="-317500">
               <a:spcBef>
                 <a:spcPts val="0"/>
               </a:spcBef>
@@ -4085,7 +4223,7 @@
               <a:buChar char="■"/>
               <a:defRPr/>
             </a:lvl3pPr>
-            <a:lvl4pPr indent="-317500" lvl="3" marL="1828800">
+            <a:lvl4pPr marL="1828800" lvl="3" indent="-317500">
               <a:spcBef>
                 <a:spcPts val="0"/>
               </a:spcBef>
@@ -4096,7 +4234,7 @@
               <a:buChar char="●"/>
               <a:defRPr/>
             </a:lvl4pPr>
-            <a:lvl5pPr indent="-317500" lvl="4" marL="2286000">
+            <a:lvl5pPr marL="2286000" lvl="4" indent="-317500">
               <a:spcBef>
                 <a:spcPts val="0"/>
               </a:spcBef>
@@ -4107,7 +4245,7 @@
               <a:buChar char="○"/>
               <a:defRPr/>
             </a:lvl5pPr>
-            <a:lvl6pPr indent="-317500" lvl="5" marL="2743200">
+            <a:lvl6pPr marL="2743200" lvl="5" indent="-317500">
               <a:spcBef>
                 <a:spcPts val="0"/>
               </a:spcBef>
@@ -4118,7 +4256,7 @@
               <a:buChar char="■"/>
               <a:defRPr/>
             </a:lvl6pPr>
-            <a:lvl7pPr indent="-317500" lvl="6" marL="3200400">
+            <a:lvl7pPr marL="3200400" lvl="6" indent="-317500">
               <a:spcBef>
                 <a:spcPts val="0"/>
               </a:spcBef>
@@ -4129,7 +4267,7 @@
               <a:buChar char="●"/>
               <a:defRPr/>
             </a:lvl7pPr>
-            <a:lvl8pPr indent="-317500" lvl="7" marL="3657600">
+            <a:lvl8pPr marL="3657600" lvl="7" indent="-317500">
               <a:spcBef>
                 <a:spcPts val="0"/>
               </a:spcBef>
@@ -4140,7 +4278,7 @@
               <a:buChar char="○"/>
               <a:defRPr/>
             </a:lvl8pPr>
-            <a:lvl9pPr indent="-317500" lvl="8" marL="4114800">
+            <a:lvl9pPr marL="4114800" lvl="8" indent="-317500">
               <a:spcBef>
                 <a:spcPts val="0"/>
               </a:spcBef>
@@ -4152,15 +4290,19 @@
               <a:defRPr/>
             </a:lvl9pPr>
           </a:lstStyle>
-          <a:p/>
+          <a:p>
+            <a:endParaRPr/>
+          </a:p>
         </p:txBody>
       </p:sp>
       <p:sp>
         <p:nvSpPr>
           <p:cNvPr id="40" name="Google Shape;40;p9"/>
-          <p:cNvSpPr txBox="1"/>
+          <p:cNvSpPr txBox="1">
+            <a:spLocks noGrp="1"/>
+          </p:cNvSpPr>
           <p:nvPr>
-            <p:ph idx="12" type="sldNum"/>
+            <p:ph type="sldNum" idx="12"/>
           </p:nvPr>
         </p:nvSpPr>
         <p:spPr>
@@ -4173,7 +4315,7 @@
           </a:prstGeom>
         </p:spPr>
         <p:txBody>
-          <a:bodyPr anchorCtr="0" anchor="ctr" bIns="91425" lIns="91425" spcFirstLastPara="1" rIns="91425" wrap="square" tIns="91425">
+          <a:bodyPr spcFirstLastPara="1" wrap="square" lIns="91425" tIns="91425" rIns="91425" bIns="91425" anchor="ctr" anchorCtr="0">
             <a:normAutofit/>
           </a:bodyPr>
           <a:lstStyle>
@@ -4215,7 +4357,7 @@
             </a:lvl9pPr>
           </a:lstStyle>
           <a:p>
-            <a:pPr indent="0" lvl="0" marL="0" rtl="0" algn="r">
+            <a:pPr marL="0" lvl="0" indent="0" algn="r" rtl="0">
               <a:spcBef>
                 <a:spcPts val="0"/>
               </a:spcBef>
@@ -4241,11 +4383,11 @@
 </file>
 
 <file path=ppt/slideLayouts/slideLayout9.xml><?xml version="1.0" encoding="utf-8"?>
-<p:sldLayout xmlns:a="http://schemas.openxmlformats.org/drawingml/2006/main" xmlns:r="http://schemas.openxmlformats.org/officeDocument/2006/relationships" xmlns:mc="http://schemas.openxmlformats.org/markup-compatibility/2006" xmlns:mv="urn:schemas-microsoft-com:mac:vml" xmlns:p="http://schemas.openxmlformats.org/presentationml/2006/main" xmlns:c="http://schemas.openxmlformats.org/drawingml/2006/chart" xmlns:dgm="http://schemas.openxmlformats.org/drawingml/2006/diagram" xmlns:o="urn:schemas-microsoft-com:office:office" xmlns:v="urn:schemas-microsoft-com:vml" xmlns:pvml="urn:schemas-microsoft-com:office:powerpoint" xmlns:com="http://schemas.openxmlformats.org/drawingml/2006/compatibility" xmlns:p14="http://schemas.microsoft.com/office/powerpoint/2010/main" xmlns:p15="http://schemas.microsoft.com/office/powerpoint/2012/main" xmlns:ahyp="http://schemas.microsoft.com/office/drawing/2018/hyperlinkcolor" matchingName="Caption">
+<p:sldLayout xmlns:a="http://schemas.openxmlformats.org/drawingml/2006/main" xmlns:r="http://schemas.openxmlformats.org/officeDocument/2006/relationships" xmlns:p="http://schemas.openxmlformats.org/presentationml/2006/main" matchingName="Caption">
   <p:cSld name="CAPTION_ONLY">
     <p:spTree>
       <p:nvGrpSpPr>
-        <p:cNvPr id="41" name="Shape 41"/>
+        <p:cNvPr id="1" name="Shape 41"/>
         <p:cNvGrpSpPr/>
         <p:nvPr/>
       </p:nvGrpSpPr>
@@ -4260,9 +4402,11 @@
       <p:sp>
         <p:nvSpPr>
           <p:cNvPr id="42" name="Google Shape;42;p10"/>
-          <p:cNvSpPr txBox="1"/>
+          <p:cNvSpPr txBox="1">
+            <a:spLocks noGrp="1"/>
+          </p:cNvSpPr>
           <p:nvPr>
-            <p:ph idx="1" type="body"/>
+            <p:ph type="body" idx="1"/>
           </p:nvPr>
         </p:nvSpPr>
         <p:spPr>
@@ -4275,11 +4419,11 @@
           </a:prstGeom>
         </p:spPr>
         <p:txBody>
-          <a:bodyPr anchorCtr="0" anchor="ctr" bIns="91425" lIns="91425" spcFirstLastPara="1" rIns="91425" wrap="square" tIns="91425">
+          <a:bodyPr spcFirstLastPara="1" wrap="square" lIns="91425" tIns="91425" rIns="91425" bIns="91425" anchor="ctr" anchorCtr="0">
             <a:normAutofit/>
           </a:bodyPr>
           <a:lstStyle>
-            <a:lvl1pPr indent="-228600" lvl="0" marL="457200">
+            <a:lvl1pPr marL="457200" lvl="0" indent="-228600">
               <a:lnSpc>
                 <a:spcPct val="100000"/>
               </a:lnSpc>
@@ -4294,15 +4438,19 @@
               <a:defRPr/>
             </a:lvl1pPr>
           </a:lstStyle>
-          <a:p/>
+          <a:p>
+            <a:endParaRPr/>
+          </a:p>
         </p:txBody>
       </p:sp>
       <p:sp>
         <p:nvSpPr>
           <p:cNvPr id="43" name="Google Shape;43;p10"/>
-          <p:cNvSpPr txBox="1"/>
+          <p:cNvSpPr txBox="1">
+            <a:spLocks noGrp="1"/>
+          </p:cNvSpPr>
           <p:nvPr>
-            <p:ph idx="12" type="sldNum"/>
+            <p:ph type="sldNum" idx="12"/>
           </p:nvPr>
         </p:nvSpPr>
         <p:spPr>
@@ -4315,7 +4463,7 @@
           </a:prstGeom>
         </p:spPr>
         <p:txBody>
-          <a:bodyPr anchorCtr="0" anchor="ctr" bIns="91425" lIns="91425" spcFirstLastPara="1" rIns="91425" wrap="square" tIns="91425">
+          <a:bodyPr spcFirstLastPara="1" wrap="square" lIns="91425" tIns="91425" rIns="91425" bIns="91425" anchor="ctr" anchorCtr="0">
             <a:normAutofit/>
           </a:bodyPr>
           <a:lstStyle>
@@ -4357,7 +4505,7 @@
             </a:lvl9pPr>
           </a:lstStyle>
           <a:p>
-            <a:pPr indent="0" lvl="0" marL="0" rtl="0" algn="r">
+            <a:pPr marL="0" lvl="0" indent="0" algn="r" rtl="0">
               <a:spcBef>
                 <a:spcPts val="0"/>
               </a:spcBef>
@@ -4383,18 +4531,19 @@
 </file>
 
 <file path=ppt/slideMasters/slideMaster1.xml><?xml version="1.0" encoding="utf-8"?>
-<p:sldMaster xmlns:a="http://schemas.openxmlformats.org/drawingml/2006/main" xmlns:r="http://schemas.openxmlformats.org/officeDocument/2006/relationships" xmlns:mc="http://schemas.openxmlformats.org/markup-compatibility/2006" xmlns:mv="urn:schemas-microsoft-com:mac:vml" xmlns:p="http://schemas.openxmlformats.org/presentationml/2006/main" xmlns:c="http://schemas.openxmlformats.org/drawingml/2006/chart" xmlns:dgm="http://schemas.openxmlformats.org/drawingml/2006/diagram" xmlns:o="urn:schemas-microsoft-com:office:office" xmlns:v="urn:schemas-microsoft-com:vml" xmlns:pvml="urn:schemas-microsoft-com:office:powerpoint" xmlns:com="http://schemas.openxmlformats.org/drawingml/2006/compatibility" xmlns:p14="http://schemas.microsoft.com/office/powerpoint/2010/main" xmlns:p15="http://schemas.microsoft.com/office/powerpoint/2012/main" xmlns:ahyp="http://schemas.microsoft.com/office/drawing/2018/hyperlinkcolor">
+<p:sldMaster xmlns:a="http://schemas.openxmlformats.org/drawingml/2006/main" xmlns:r="http://schemas.openxmlformats.org/officeDocument/2006/relationships" xmlns:p="http://schemas.openxmlformats.org/presentationml/2006/main">
   <p:cSld name="simple-light-2">
     <p:bg>
       <p:bgPr>
         <a:solidFill>
           <a:schemeClr val="lt1"/>
         </a:solidFill>
+        <a:effectLst/>
       </p:bgPr>
     </p:bg>
     <p:spTree>
       <p:nvGrpSpPr>
-        <p:cNvPr id="5" name="Shape 5"/>
+        <p:cNvPr id="1" name="Shape 5"/>
         <p:cNvGrpSpPr/>
         <p:nvPr/>
       </p:nvGrpSpPr>
@@ -4409,7 +4558,9 @@
       <p:sp>
         <p:nvSpPr>
           <p:cNvPr id="6" name="Google Shape;6;p1"/>
-          <p:cNvSpPr txBox="1"/>
+          <p:cNvSpPr txBox="1">
+            <a:spLocks noGrp="1"/>
+          </p:cNvSpPr>
           <p:nvPr>
             <p:ph type="title"/>
           </p:nvPr>
@@ -4428,7 +4579,7 @@
           </a:ln>
         </p:spPr>
         <p:txBody>
-          <a:bodyPr anchorCtr="0" anchor="t" bIns="91425" lIns="91425" spcFirstLastPara="1" rIns="91425" wrap="square" tIns="91425">
+          <a:bodyPr spcFirstLastPara="1" wrap="square" lIns="91425" tIns="91425" rIns="91425" bIns="91425" anchor="t" anchorCtr="0">
             <a:normAutofit/>
           </a:bodyPr>
           <a:lstStyle>
@@ -4595,15 +4746,19 @@
               </a:defRPr>
             </a:lvl9pPr>
           </a:lstStyle>
-          <a:p/>
+          <a:p>
+            <a:endParaRPr/>
+          </a:p>
         </p:txBody>
       </p:sp>
       <p:sp>
         <p:nvSpPr>
           <p:cNvPr id="7" name="Google Shape;7;p1"/>
-          <p:cNvSpPr txBox="1"/>
+          <p:cNvSpPr txBox="1">
+            <a:spLocks noGrp="1"/>
+          </p:cNvSpPr>
           <p:nvPr>
-            <p:ph idx="1" type="body"/>
+            <p:ph type="body" idx="1"/>
           </p:nvPr>
         </p:nvSpPr>
         <p:spPr>
@@ -4620,11 +4775,11 @@
           </a:ln>
         </p:spPr>
         <p:txBody>
-          <a:bodyPr anchorCtr="0" anchor="t" bIns="91425" lIns="91425" spcFirstLastPara="1" rIns="91425" wrap="square" tIns="91425">
+          <a:bodyPr spcFirstLastPara="1" wrap="square" lIns="91425" tIns="91425" rIns="91425" bIns="91425" anchor="t" anchorCtr="0">
             <a:normAutofit/>
           </a:bodyPr>
           <a:lstStyle>
-            <a:lvl1pPr indent="-342900" lvl="0" marL="457200">
+            <a:lvl1pPr marL="457200" lvl="0" indent="-342900">
               <a:lnSpc>
                 <a:spcPct val="115000"/>
               </a:lnSpc>
@@ -4645,7 +4800,7 @@
                 </a:solidFill>
               </a:defRPr>
             </a:lvl1pPr>
-            <a:lvl2pPr indent="-317500" lvl="1" marL="914400">
+            <a:lvl2pPr marL="914400" lvl="1" indent="-317500">
               <a:lnSpc>
                 <a:spcPct val="115000"/>
               </a:lnSpc>
@@ -4666,7 +4821,7 @@
                 </a:solidFill>
               </a:defRPr>
             </a:lvl2pPr>
-            <a:lvl3pPr indent="-317500" lvl="2" marL="1371600">
+            <a:lvl3pPr marL="1371600" lvl="2" indent="-317500">
               <a:lnSpc>
                 <a:spcPct val="115000"/>
               </a:lnSpc>
@@ -4687,7 +4842,7 @@
                 </a:solidFill>
               </a:defRPr>
             </a:lvl3pPr>
-            <a:lvl4pPr indent="-317500" lvl="3" marL="1828800">
+            <a:lvl4pPr marL="1828800" lvl="3" indent="-317500">
               <a:lnSpc>
                 <a:spcPct val="115000"/>
               </a:lnSpc>
@@ -4708,7 +4863,7 @@
                 </a:solidFill>
               </a:defRPr>
             </a:lvl4pPr>
-            <a:lvl5pPr indent="-317500" lvl="4" marL="2286000">
+            <a:lvl5pPr marL="2286000" lvl="4" indent="-317500">
               <a:lnSpc>
                 <a:spcPct val="115000"/>
               </a:lnSpc>
@@ -4729,7 +4884,7 @@
                 </a:solidFill>
               </a:defRPr>
             </a:lvl5pPr>
-            <a:lvl6pPr indent="-317500" lvl="5" marL="2743200">
+            <a:lvl6pPr marL="2743200" lvl="5" indent="-317500">
               <a:lnSpc>
                 <a:spcPct val="115000"/>
               </a:lnSpc>
@@ -4750,7 +4905,7 @@
                 </a:solidFill>
               </a:defRPr>
             </a:lvl6pPr>
-            <a:lvl7pPr indent="-317500" lvl="6" marL="3200400">
+            <a:lvl7pPr marL="3200400" lvl="6" indent="-317500">
               <a:lnSpc>
                 <a:spcPct val="115000"/>
               </a:lnSpc>
@@ -4771,7 +4926,7 @@
                 </a:solidFill>
               </a:defRPr>
             </a:lvl7pPr>
-            <a:lvl8pPr indent="-317500" lvl="7" marL="3657600">
+            <a:lvl8pPr marL="3657600" lvl="7" indent="-317500">
               <a:lnSpc>
                 <a:spcPct val="115000"/>
               </a:lnSpc>
@@ -4792,7 +4947,7 @@
                 </a:solidFill>
               </a:defRPr>
             </a:lvl8pPr>
-            <a:lvl9pPr indent="-317500" lvl="8" marL="4114800">
+            <a:lvl9pPr marL="4114800" lvl="8" indent="-317500">
               <a:lnSpc>
                 <a:spcPct val="115000"/>
               </a:lnSpc>
@@ -4814,15 +4969,19 @@
               </a:defRPr>
             </a:lvl9pPr>
           </a:lstStyle>
-          <a:p/>
+          <a:p>
+            <a:endParaRPr/>
+          </a:p>
         </p:txBody>
       </p:sp>
       <p:sp>
         <p:nvSpPr>
           <p:cNvPr id="8" name="Google Shape;8;p1"/>
-          <p:cNvSpPr txBox="1"/>
+          <p:cNvSpPr txBox="1">
+            <a:spLocks noGrp="1"/>
+          </p:cNvSpPr>
           <p:nvPr>
-            <p:ph idx="12" type="sldNum"/>
+            <p:ph type="sldNum" idx="12"/>
           </p:nvPr>
         </p:nvSpPr>
         <p:spPr>
@@ -4839,7 +4998,7 @@
           </a:ln>
         </p:spPr>
         <p:txBody>
-          <a:bodyPr anchorCtr="0" anchor="ctr" bIns="91425" lIns="91425" spcFirstLastPara="1" rIns="91425" wrap="square" tIns="91425">
+          <a:bodyPr spcFirstLastPara="1" wrap="square" lIns="91425" tIns="91425" rIns="91425" bIns="91425" anchor="ctr" anchorCtr="0">
             <a:normAutofit/>
           </a:bodyPr>
           <a:lstStyle>
@@ -4917,7 +5076,7 @@
             </a:lvl9pPr>
           </a:lstStyle>
           <a:p>
-            <a:pPr indent="0" lvl="0" marL="0" rtl="0" algn="r">
+            <a:pPr marL="0" lvl="0" indent="0" algn="r" rtl="0">
               <a:spcBef>
                 <a:spcPts val="0"/>
               </a:spcBef>
@@ -4936,7 +5095,7 @@
       </p:sp>
     </p:spTree>
   </p:cSld>
-  <p:clrMap accent1="accent1" accent2="accent2" accent3="accent3" accent4="accent4" accent5="accent5" accent6="accent6" bg1="lt1" bg2="dk2" tx1="dk1" tx2="lt2" folHlink="folHlink" hlink="hlink"/>
+  <p:clrMap bg1="lt1" tx1="dk1" bg2="dk2" tx2="lt2" accent1="accent1" accent2="accent2" accent3="accent3" accent4="accent4" accent5="accent5" accent6="accent6" hlink="hlink" folHlink="folHlink"/>
   <p:sldLayoutIdLst>
     <p:sldLayoutId id="2147483648" r:id="rId1"/>
     <p:sldLayoutId id="2147483649" r:id="rId2"/>
@@ -4950,10 +5109,10 @@
     <p:sldLayoutId id="2147483657" r:id="rId10"/>
     <p:sldLayoutId id="2147483658" r:id="rId11"/>
   </p:sldLayoutIdLst>
-  <p:hf dt="0" ftr="0" hdr="0" sldNum="0"/>
+  <p:hf sldNum="0" hdr="0" ftr="0" dt="0"/>
   <p:txStyles>
     <p:titleStyle>
-      <a:defPPr lvl="0" marR="0" rtl="0" algn="l">
+      <a:defPPr marR="0" lvl="0" algn="l" rtl="0">
         <a:lnSpc>
           <a:spcPct val="100000"/>
         </a:lnSpc>
@@ -4964,7 +5123,7 @@
           <a:spcPts val="0"/>
         </a:spcAft>
       </a:defPPr>
-      <a:lvl1pPr lvl="0" marR="0" rtl="0" algn="l">
+      <a:lvl1pPr marR="0" lvl="0" algn="l" rtl="0">
         <a:lnSpc>
           <a:spcPct val="100000"/>
         </a:lnSpc>
@@ -4978,7 +5137,7 @@
           <a:srgbClr val="000000"/>
         </a:buClr>
         <a:buFont typeface="Arial"/>
-        <a:defRPr b="0" i="0" sz="1400" u="none" cap="none" strike="noStrike">
+        <a:defRPr sz="1400" b="0" i="0" u="none" strike="noStrike" cap="none">
           <a:solidFill>
             <a:srgbClr val="000000"/>
           </a:solidFill>
@@ -4988,7 +5147,7 @@
           <a:sym typeface="Arial"/>
         </a:defRPr>
       </a:lvl1pPr>
-      <a:lvl2pPr lvl="1" marR="0" rtl="0" algn="l">
+      <a:lvl2pPr marR="0" lvl="1" algn="l" rtl="0">
         <a:lnSpc>
           <a:spcPct val="100000"/>
         </a:lnSpc>
@@ -5002,7 +5161,7 @@
           <a:srgbClr val="000000"/>
         </a:buClr>
         <a:buFont typeface="Arial"/>
-        <a:defRPr b="0" i="0" sz="1400" u="none" cap="none" strike="noStrike">
+        <a:defRPr sz="1400" b="0" i="0" u="none" strike="noStrike" cap="none">
           <a:solidFill>
             <a:srgbClr val="000000"/>
           </a:solidFill>
@@ -5012,7 +5171,7 @@
           <a:sym typeface="Arial"/>
         </a:defRPr>
       </a:lvl2pPr>
-      <a:lvl3pPr lvl="2" marR="0" rtl="0" algn="l">
+      <a:lvl3pPr marR="0" lvl="2" algn="l" rtl="0">
         <a:lnSpc>
           <a:spcPct val="100000"/>
         </a:lnSpc>
@@ -5026,7 +5185,7 @@
           <a:srgbClr val="000000"/>
         </a:buClr>
         <a:buFont typeface="Arial"/>
-        <a:defRPr b="0" i="0" sz="1400" u="none" cap="none" strike="noStrike">
+        <a:defRPr sz="1400" b="0" i="0" u="none" strike="noStrike" cap="none">
           <a:solidFill>
             <a:srgbClr val="000000"/>
           </a:solidFill>
@@ -5036,7 +5195,7 @@
           <a:sym typeface="Arial"/>
         </a:defRPr>
       </a:lvl3pPr>
-      <a:lvl4pPr lvl="3" marR="0" rtl="0" algn="l">
+      <a:lvl4pPr marR="0" lvl="3" algn="l" rtl="0">
         <a:lnSpc>
           <a:spcPct val="100000"/>
         </a:lnSpc>
@@ -5050,7 +5209,7 @@
           <a:srgbClr val="000000"/>
         </a:buClr>
         <a:buFont typeface="Arial"/>
-        <a:defRPr b="0" i="0" sz="1400" u="none" cap="none" strike="noStrike">
+        <a:defRPr sz="1400" b="0" i="0" u="none" strike="noStrike" cap="none">
           <a:solidFill>
             <a:srgbClr val="000000"/>
           </a:solidFill>
@@ -5060,7 +5219,7 @@
           <a:sym typeface="Arial"/>
         </a:defRPr>
       </a:lvl4pPr>
-      <a:lvl5pPr lvl="4" marR="0" rtl="0" algn="l">
+      <a:lvl5pPr marR="0" lvl="4" algn="l" rtl="0">
         <a:lnSpc>
           <a:spcPct val="100000"/>
         </a:lnSpc>
@@ -5074,7 +5233,7 @@
           <a:srgbClr val="000000"/>
         </a:buClr>
         <a:buFont typeface="Arial"/>
-        <a:defRPr b="0" i="0" sz="1400" u="none" cap="none" strike="noStrike">
+        <a:defRPr sz="1400" b="0" i="0" u="none" strike="noStrike" cap="none">
           <a:solidFill>
             <a:srgbClr val="000000"/>
           </a:solidFill>
@@ -5084,7 +5243,7 @@
           <a:sym typeface="Arial"/>
         </a:defRPr>
       </a:lvl5pPr>
-      <a:lvl6pPr lvl="5" marR="0" rtl="0" algn="l">
+      <a:lvl6pPr marR="0" lvl="5" algn="l" rtl="0">
         <a:lnSpc>
           <a:spcPct val="100000"/>
         </a:lnSpc>
@@ -5098,7 +5257,7 @@
           <a:srgbClr val="000000"/>
         </a:buClr>
         <a:buFont typeface="Arial"/>
-        <a:defRPr b="0" i="0" sz="1400" u="none" cap="none" strike="noStrike">
+        <a:defRPr sz="1400" b="0" i="0" u="none" strike="noStrike" cap="none">
           <a:solidFill>
             <a:srgbClr val="000000"/>
           </a:solidFill>
@@ -5108,7 +5267,7 @@
           <a:sym typeface="Arial"/>
         </a:defRPr>
       </a:lvl6pPr>
-      <a:lvl7pPr lvl="6" marR="0" rtl="0" algn="l">
+      <a:lvl7pPr marR="0" lvl="6" algn="l" rtl="0">
         <a:lnSpc>
           <a:spcPct val="100000"/>
         </a:lnSpc>
@@ -5122,7 +5281,7 @@
           <a:srgbClr val="000000"/>
         </a:buClr>
         <a:buFont typeface="Arial"/>
-        <a:defRPr b="0" i="0" sz="1400" u="none" cap="none" strike="noStrike">
+        <a:defRPr sz="1400" b="0" i="0" u="none" strike="noStrike" cap="none">
           <a:solidFill>
             <a:srgbClr val="000000"/>
           </a:solidFill>
@@ -5132,7 +5291,7 @@
           <a:sym typeface="Arial"/>
         </a:defRPr>
       </a:lvl7pPr>
-      <a:lvl8pPr lvl="7" marR="0" rtl="0" algn="l">
+      <a:lvl8pPr marR="0" lvl="7" algn="l" rtl="0">
         <a:lnSpc>
           <a:spcPct val="100000"/>
         </a:lnSpc>
@@ -5146,7 +5305,7 @@
           <a:srgbClr val="000000"/>
         </a:buClr>
         <a:buFont typeface="Arial"/>
-        <a:defRPr b="0" i="0" sz="1400" u="none" cap="none" strike="noStrike">
+        <a:defRPr sz="1400" b="0" i="0" u="none" strike="noStrike" cap="none">
           <a:solidFill>
             <a:srgbClr val="000000"/>
           </a:solidFill>
@@ -5156,7 +5315,7 @@
           <a:sym typeface="Arial"/>
         </a:defRPr>
       </a:lvl8pPr>
-      <a:lvl9pPr lvl="8" marR="0" rtl="0" algn="l">
+      <a:lvl9pPr marR="0" lvl="8" algn="l" rtl="0">
         <a:lnSpc>
           <a:spcPct val="100000"/>
         </a:lnSpc>
@@ -5170,7 +5329,7 @@
           <a:srgbClr val="000000"/>
         </a:buClr>
         <a:buFont typeface="Arial"/>
-        <a:defRPr b="0" i="0" sz="1400" u="none" cap="none" strike="noStrike">
+        <a:defRPr sz="1400" b="0" i="0" u="none" strike="noStrike" cap="none">
           <a:solidFill>
             <a:srgbClr val="000000"/>
           </a:solidFill>
@@ -5182,7 +5341,7 @@
       </a:lvl9pPr>
     </p:titleStyle>
     <p:bodyStyle>
-      <a:defPPr lvl="0" marR="0" rtl="0" algn="l">
+      <a:defPPr marR="0" lvl="0" algn="l" rtl="0">
         <a:lnSpc>
           <a:spcPct val="100000"/>
         </a:lnSpc>
@@ -5193,7 +5352,7 @@
           <a:spcPts val="0"/>
         </a:spcAft>
       </a:defPPr>
-      <a:lvl1pPr lvl="0" marR="0" rtl="0" algn="l">
+      <a:lvl1pPr marR="0" lvl="0" algn="l" rtl="0">
         <a:lnSpc>
           <a:spcPct val="100000"/>
         </a:lnSpc>
@@ -5207,7 +5366,7 @@
           <a:srgbClr val="000000"/>
         </a:buClr>
         <a:buFont typeface="Arial"/>
-        <a:defRPr b="0" i="0" sz="1400" u="none" cap="none" strike="noStrike">
+        <a:defRPr sz="1400" b="0" i="0" u="none" strike="noStrike" cap="none">
           <a:solidFill>
             <a:srgbClr val="000000"/>
           </a:solidFill>
@@ -5217,7 +5376,7 @@
           <a:sym typeface="Arial"/>
         </a:defRPr>
       </a:lvl1pPr>
-      <a:lvl2pPr lvl="1" marR="0" rtl="0" algn="l">
+      <a:lvl2pPr marR="0" lvl="1" algn="l" rtl="0">
         <a:lnSpc>
           <a:spcPct val="100000"/>
         </a:lnSpc>
@@ -5231,7 +5390,7 @@
           <a:srgbClr val="000000"/>
         </a:buClr>
         <a:buFont typeface="Arial"/>
-        <a:defRPr b="0" i="0" sz="1400" u="none" cap="none" strike="noStrike">
+        <a:defRPr sz="1400" b="0" i="0" u="none" strike="noStrike" cap="none">
           <a:solidFill>
             <a:srgbClr val="000000"/>
           </a:solidFill>
@@ -5241,7 +5400,7 @@
           <a:sym typeface="Arial"/>
         </a:defRPr>
       </a:lvl2pPr>
-      <a:lvl3pPr lvl="2" marR="0" rtl="0" algn="l">
+      <a:lvl3pPr marR="0" lvl="2" algn="l" rtl="0">
         <a:lnSpc>
           <a:spcPct val="100000"/>
         </a:lnSpc>
@@ -5255,7 +5414,7 @@
           <a:srgbClr val="000000"/>
         </a:buClr>
         <a:buFont typeface="Arial"/>
-        <a:defRPr b="0" i="0" sz="1400" u="none" cap="none" strike="noStrike">
+        <a:defRPr sz="1400" b="0" i="0" u="none" strike="noStrike" cap="none">
           <a:solidFill>
             <a:srgbClr val="000000"/>
           </a:solidFill>
@@ -5265,7 +5424,7 @@
           <a:sym typeface="Arial"/>
         </a:defRPr>
       </a:lvl3pPr>
-      <a:lvl4pPr lvl="3" marR="0" rtl="0" algn="l">
+      <a:lvl4pPr marR="0" lvl="3" algn="l" rtl="0">
         <a:lnSpc>
           <a:spcPct val="100000"/>
         </a:lnSpc>
@@ -5279,7 +5438,7 @@
           <a:srgbClr val="000000"/>
         </a:buClr>
         <a:buFont typeface="Arial"/>
-        <a:defRPr b="0" i="0" sz="1400" u="none" cap="none" strike="noStrike">
+        <a:defRPr sz="1400" b="0" i="0" u="none" strike="noStrike" cap="none">
           <a:solidFill>
             <a:srgbClr val="000000"/>
           </a:solidFill>
@@ -5289,7 +5448,7 @@
           <a:sym typeface="Arial"/>
         </a:defRPr>
       </a:lvl4pPr>
-      <a:lvl5pPr lvl="4" marR="0" rtl="0" algn="l">
+      <a:lvl5pPr marR="0" lvl="4" algn="l" rtl="0">
         <a:lnSpc>
           <a:spcPct val="100000"/>
         </a:lnSpc>
@@ -5303,7 +5462,7 @@
           <a:srgbClr val="000000"/>
         </a:buClr>
         <a:buFont typeface="Arial"/>
-        <a:defRPr b="0" i="0" sz="1400" u="none" cap="none" strike="noStrike">
+        <a:defRPr sz="1400" b="0" i="0" u="none" strike="noStrike" cap="none">
           <a:solidFill>
             <a:srgbClr val="000000"/>
           </a:solidFill>
@@ -5313,7 +5472,7 @@
           <a:sym typeface="Arial"/>
         </a:defRPr>
       </a:lvl5pPr>
-      <a:lvl6pPr lvl="5" marR="0" rtl="0" algn="l">
+      <a:lvl6pPr marR="0" lvl="5" algn="l" rtl="0">
         <a:lnSpc>
           <a:spcPct val="100000"/>
         </a:lnSpc>
@@ -5327,7 +5486,7 @@
           <a:srgbClr val="000000"/>
         </a:buClr>
         <a:buFont typeface="Arial"/>
-        <a:defRPr b="0" i="0" sz="1400" u="none" cap="none" strike="noStrike">
+        <a:defRPr sz="1400" b="0" i="0" u="none" strike="noStrike" cap="none">
           <a:solidFill>
             <a:srgbClr val="000000"/>
           </a:solidFill>
@@ -5337,7 +5496,7 @@
           <a:sym typeface="Arial"/>
         </a:defRPr>
       </a:lvl6pPr>
-      <a:lvl7pPr lvl="6" marR="0" rtl="0" algn="l">
+      <a:lvl7pPr marR="0" lvl="6" algn="l" rtl="0">
         <a:lnSpc>
           <a:spcPct val="100000"/>
         </a:lnSpc>
@@ -5351,7 +5510,7 @@
           <a:srgbClr val="000000"/>
         </a:buClr>
         <a:buFont typeface="Arial"/>
-        <a:defRPr b="0" i="0" sz="1400" u="none" cap="none" strike="noStrike">
+        <a:defRPr sz="1400" b="0" i="0" u="none" strike="noStrike" cap="none">
           <a:solidFill>
             <a:srgbClr val="000000"/>
           </a:solidFill>
@@ -5361,7 +5520,7 @@
           <a:sym typeface="Arial"/>
         </a:defRPr>
       </a:lvl7pPr>
-      <a:lvl8pPr lvl="7" marR="0" rtl="0" algn="l">
+      <a:lvl8pPr marR="0" lvl="7" algn="l" rtl="0">
         <a:lnSpc>
           <a:spcPct val="100000"/>
         </a:lnSpc>
@@ -5375,7 +5534,7 @@
           <a:srgbClr val="000000"/>
         </a:buClr>
         <a:buFont typeface="Arial"/>
-        <a:defRPr b="0" i="0" sz="1400" u="none" cap="none" strike="noStrike">
+        <a:defRPr sz="1400" b="0" i="0" u="none" strike="noStrike" cap="none">
           <a:solidFill>
             <a:srgbClr val="000000"/>
           </a:solidFill>
@@ -5385,7 +5544,7 @@
           <a:sym typeface="Arial"/>
         </a:defRPr>
       </a:lvl8pPr>
-      <a:lvl9pPr lvl="8" marR="0" rtl="0" algn="l">
+      <a:lvl9pPr marR="0" lvl="8" algn="l" rtl="0">
         <a:lnSpc>
           <a:spcPct val="100000"/>
         </a:lnSpc>
@@ -5399,7 +5558,7 @@
           <a:srgbClr val="000000"/>
         </a:buClr>
         <a:buFont typeface="Arial"/>
-        <a:defRPr b="0" i="0" sz="1400" u="none" cap="none" strike="noStrike">
+        <a:defRPr sz="1400" b="0" i="0" u="none" strike="noStrike" cap="none">
           <a:solidFill>
             <a:srgbClr val="000000"/>
           </a:solidFill>
@@ -5411,7 +5570,7 @@
       </a:lvl9pPr>
     </p:bodyStyle>
     <p:otherStyle>
-      <a:defPPr lvl="0" marR="0" rtl="0" algn="l">
+      <a:defPPr marR="0" lvl="0" algn="l" rtl="0">
         <a:lnSpc>
           <a:spcPct val="100000"/>
         </a:lnSpc>
@@ -5422,7 +5581,7 @@
           <a:spcPts val="0"/>
         </a:spcAft>
       </a:defPPr>
-      <a:lvl1pPr lvl="0" marR="0" rtl="0" algn="l">
+      <a:lvl1pPr marR="0" lvl="0" algn="l" rtl="0">
         <a:lnSpc>
           <a:spcPct val="100000"/>
         </a:lnSpc>
@@ -5436,7 +5595,7 @@
           <a:srgbClr val="000000"/>
         </a:buClr>
         <a:buFont typeface="Arial"/>
-        <a:defRPr b="0" i="0" sz="1400" u="none" cap="none" strike="noStrike">
+        <a:defRPr sz="1400" b="0" i="0" u="none" strike="noStrike" cap="none">
           <a:solidFill>
             <a:srgbClr val="000000"/>
           </a:solidFill>
@@ -5446,7 +5605,7 @@
           <a:sym typeface="Arial"/>
         </a:defRPr>
       </a:lvl1pPr>
-      <a:lvl2pPr lvl="1" marR="0" rtl="0" algn="l">
+      <a:lvl2pPr marR="0" lvl="1" algn="l" rtl="0">
         <a:lnSpc>
           <a:spcPct val="100000"/>
         </a:lnSpc>
@@ -5460,7 +5619,7 @@
           <a:srgbClr val="000000"/>
         </a:buClr>
         <a:buFont typeface="Arial"/>
-        <a:defRPr b="0" i="0" sz="1400" u="none" cap="none" strike="noStrike">
+        <a:defRPr sz="1400" b="0" i="0" u="none" strike="noStrike" cap="none">
           <a:solidFill>
             <a:srgbClr val="000000"/>
           </a:solidFill>
@@ -5470,7 +5629,7 @@
           <a:sym typeface="Arial"/>
         </a:defRPr>
       </a:lvl2pPr>
-      <a:lvl3pPr lvl="2" marR="0" rtl="0" algn="l">
+      <a:lvl3pPr marR="0" lvl="2" algn="l" rtl="0">
         <a:lnSpc>
           <a:spcPct val="100000"/>
         </a:lnSpc>
@@ -5484,7 +5643,7 @@
           <a:srgbClr val="000000"/>
         </a:buClr>
         <a:buFont typeface="Arial"/>
-        <a:defRPr b="0" i="0" sz="1400" u="none" cap="none" strike="noStrike">
+        <a:defRPr sz="1400" b="0" i="0" u="none" strike="noStrike" cap="none">
           <a:solidFill>
             <a:srgbClr val="000000"/>
           </a:solidFill>
@@ -5494,7 +5653,7 @@
           <a:sym typeface="Arial"/>
         </a:defRPr>
       </a:lvl3pPr>
-      <a:lvl4pPr lvl="3" marR="0" rtl="0" algn="l">
+      <a:lvl4pPr marR="0" lvl="3" algn="l" rtl="0">
         <a:lnSpc>
           <a:spcPct val="100000"/>
         </a:lnSpc>
@@ -5508,7 +5667,7 @@
           <a:srgbClr val="000000"/>
         </a:buClr>
         <a:buFont typeface="Arial"/>
-        <a:defRPr b="0" i="0" sz="1400" u="none" cap="none" strike="noStrike">
+        <a:defRPr sz="1400" b="0" i="0" u="none" strike="noStrike" cap="none">
           <a:solidFill>
             <a:srgbClr val="000000"/>
           </a:solidFill>
@@ -5518,7 +5677,7 @@
           <a:sym typeface="Arial"/>
         </a:defRPr>
       </a:lvl4pPr>
-      <a:lvl5pPr lvl="4" marR="0" rtl="0" algn="l">
+      <a:lvl5pPr marR="0" lvl="4" algn="l" rtl="0">
         <a:lnSpc>
           <a:spcPct val="100000"/>
         </a:lnSpc>
@@ -5532,7 +5691,7 @@
           <a:srgbClr val="000000"/>
         </a:buClr>
         <a:buFont typeface="Arial"/>
-        <a:defRPr b="0" i="0" sz="1400" u="none" cap="none" strike="noStrike">
+        <a:defRPr sz="1400" b="0" i="0" u="none" strike="noStrike" cap="none">
           <a:solidFill>
             <a:srgbClr val="000000"/>
           </a:solidFill>
@@ -5542,7 +5701,7 @@
           <a:sym typeface="Arial"/>
         </a:defRPr>
       </a:lvl5pPr>
-      <a:lvl6pPr lvl="5" marR="0" rtl="0" algn="l">
+      <a:lvl6pPr marR="0" lvl="5" algn="l" rtl="0">
         <a:lnSpc>
           <a:spcPct val="100000"/>
         </a:lnSpc>
@@ -5556,7 +5715,7 @@
           <a:srgbClr val="000000"/>
         </a:buClr>
         <a:buFont typeface="Arial"/>
-        <a:defRPr b="0" i="0" sz="1400" u="none" cap="none" strike="noStrike">
+        <a:defRPr sz="1400" b="0" i="0" u="none" strike="noStrike" cap="none">
           <a:solidFill>
             <a:srgbClr val="000000"/>
           </a:solidFill>
@@ -5566,7 +5725,7 @@
           <a:sym typeface="Arial"/>
         </a:defRPr>
       </a:lvl6pPr>
-      <a:lvl7pPr lvl="6" marR="0" rtl="0" algn="l">
+      <a:lvl7pPr marR="0" lvl="6" algn="l" rtl="0">
         <a:lnSpc>
           <a:spcPct val="100000"/>
         </a:lnSpc>
@@ -5580,7 +5739,7 @@
           <a:srgbClr val="000000"/>
         </a:buClr>
         <a:buFont typeface="Arial"/>
-        <a:defRPr b="0" i="0" sz="1400" u="none" cap="none" strike="noStrike">
+        <a:defRPr sz="1400" b="0" i="0" u="none" strike="noStrike" cap="none">
           <a:solidFill>
             <a:srgbClr val="000000"/>
           </a:solidFill>
@@ -5590,7 +5749,7 @@
           <a:sym typeface="Arial"/>
         </a:defRPr>
       </a:lvl7pPr>
-      <a:lvl8pPr lvl="7" marR="0" rtl="0" algn="l">
+      <a:lvl8pPr marR="0" lvl="7" algn="l" rtl="0">
         <a:lnSpc>
           <a:spcPct val="100000"/>
         </a:lnSpc>
@@ -5604,7 +5763,7 @@
           <a:srgbClr val="000000"/>
         </a:buClr>
         <a:buFont typeface="Arial"/>
-        <a:defRPr b="0" i="0" sz="1400" u="none" cap="none" strike="noStrike">
+        <a:defRPr sz="1400" b="0" i="0" u="none" strike="noStrike" cap="none">
           <a:solidFill>
             <a:srgbClr val="000000"/>
           </a:solidFill>
@@ -5614,7 +5773,7 @@
           <a:sym typeface="Arial"/>
         </a:defRPr>
       </a:lvl8pPr>
-      <a:lvl9pPr lvl="8" marR="0" rtl="0" algn="l">
+      <a:lvl9pPr marR="0" lvl="8" algn="l" rtl="0">
         <a:lnSpc>
           <a:spcPct val="100000"/>
         </a:lnSpc>
@@ -5628,7 +5787,7 @@
           <a:srgbClr val="000000"/>
         </a:buClr>
         <a:buFont typeface="Arial"/>
-        <a:defRPr b="0" i="0" sz="1400" u="none" cap="none" strike="noStrike">
+        <a:defRPr sz="1400" b="0" i="0" u="none" strike="noStrike" cap="none">
           <a:solidFill>
             <a:srgbClr val="000000"/>
           </a:solidFill>
@@ -5644,7 +5803,7 @@
 </file>
 
 <file path=ppt/slides/slide1.xml><?xml version="1.0" encoding="utf-8"?>
-<p:sld xmlns:a="http://schemas.openxmlformats.org/drawingml/2006/main" xmlns:r="http://schemas.openxmlformats.org/officeDocument/2006/relationships" xmlns:mc="http://schemas.openxmlformats.org/markup-compatibility/2006" xmlns:mv="urn:schemas-microsoft-com:mac:vml" xmlns:p="http://schemas.openxmlformats.org/presentationml/2006/main" xmlns:c="http://schemas.openxmlformats.org/drawingml/2006/chart" xmlns:dgm="http://schemas.openxmlformats.org/drawingml/2006/diagram" xmlns:o="urn:schemas-microsoft-com:office:office" xmlns:v="urn:schemas-microsoft-com:vml" xmlns:pvml="urn:schemas-microsoft-com:office:powerpoint" xmlns:com="http://schemas.openxmlformats.org/drawingml/2006/compatibility" xmlns:p14="http://schemas.microsoft.com/office/powerpoint/2010/main" xmlns:p15="http://schemas.microsoft.com/office/powerpoint/2012/main" xmlns:ahyp="http://schemas.microsoft.com/office/drawing/2018/hyperlinkcolor">
+<p:sld xmlns:a="http://schemas.openxmlformats.org/drawingml/2006/main" xmlns:r="http://schemas.openxmlformats.org/officeDocument/2006/relationships" xmlns:p="http://schemas.openxmlformats.org/presentationml/2006/main">
   <p:cSld>
     <p:bg>
       <p:bgPr>
@@ -5659,11 +5818,12 @@
           </a:gsLst>
           <a:lin ang="5400012" scaled="0"/>
         </a:gradFill>
+        <a:effectLst/>
       </p:bgPr>
     </p:bg>
     <p:spTree>
       <p:nvGrpSpPr>
-        <p:cNvPr id="53" name="Shape 53"/>
+        <p:cNvPr id="1" name="Shape 53"/>
         <p:cNvGrpSpPr/>
         <p:nvPr/>
       </p:nvGrpSpPr>
@@ -5678,7 +5838,9 @@
       <p:sp>
         <p:nvSpPr>
           <p:cNvPr id="54" name="Google Shape;54;p13"/>
-          <p:cNvSpPr txBox="1"/>
+          <p:cNvSpPr txBox="1">
+            <a:spLocks noGrp="1"/>
+          </p:cNvSpPr>
           <p:nvPr>
             <p:ph type="ctrTitle"/>
           </p:nvPr>
@@ -5693,12 +5855,12 @@
           </a:prstGeom>
         </p:spPr>
         <p:txBody>
-          <a:bodyPr anchorCtr="0" anchor="b" bIns="91425" lIns="91425" spcFirstLastPara="1" rIns="91425" wrap="square" tIns="91425">
+          <a:bodyPr spcFirstLastPara="1" wrap="square" lIns="91425" tIns="91425" rIns="91425" bIns="91425" anchor="b" anchorCtr="0">
             <a:normAutofit/>
           </a:bodyPr>
           <a:lstStyle/>
           <a:p>
-            <a:pPr indent="0" lvl="0" marL="0" rtl="0" algn="ctr">
+            <a:pPr marL="0" lvl="0" indent="0" algn="ctr" rtl="0">
               <a:spcBef>
                 <a:spcPts val="0"/>
               </a:spcBef>
@@ -5717,31 +5879,7 @@
                 <a:cs typeface="Times New Roman"/>
                 <a:sym typeface="Times New Roman"/>
               </a:rPr>
-              <a:t>Triad </a:t>
-            </a:r>
-            <a:r>
-              <a:rPr lang="en" sz="6000" u="sng">
-                <a:solidFill>
-                  <a:schemeClr val="lt1"/>
-                </a:solidFill>
-                <a:latin typeface="Times New Roman"/>
-                <a:ea typeface="Times New Roman"/>
-                <a:cs typeface="Times New Roman"/>
-                <a:sym typeface="Times New Roman"/>
-              </a:rPr>
-              <a:t>Activities</a:t>
-            </a:r>
-            <a:r>
-              <a:rPr lang="en" sz="6000" u="sng">
-                <a:solidFill>
-                  <a:schemeClr val="lt1"/>
-                </a:solidFill>
-                <a:latin typeface="Times New Roman"/>
-                <a:ea typeface="Times New Roman"/>
-                <a:cs typeface="Times New Roman"/>
-                <a:sym typeface="Times New Roman"/>
-              </a:rPr>
-              <a:t> </a:t>
+              <a:t>Triad Activities </a:t>
             </a:r>
             <a:endParaRPr sz="6000" u="sng">
               <a:solidFill>
@@ -5758,9 +5896,11 @@
       <p:sp>
         <p:nvSpPr>
           <p:cNvPr id="55" name="Google Shape;55;p13"/>
-          <p:cNvSpPr txBox="1"/>
+          <p:cNvSpPr txBox="1">
+            <a:spLocks noGrp="1"/>
+          </p:cNvSpPr>
           <p:nvPr>
-            <p:ph idx="1" type="subTitle"/>
+            <p:ph type="subTitle" idx="1"/>
           </p:nvPr>
         </p:nvSpPr>
         <p:spPr>
@@ -5773,12 +5913,12 @@
           </a:prstGeom>
         </p:spPr>
         <p:txBody>
-          <a:bodyPr anchorCtr="0" anchor="t" bIns="91425" lIns="91425" spcFirstLastPara="1" rIns="91425" wrap="square" tIns="91425">
+          <a:bodyPr spcFirstLastPara="1" wrap="square" lIns="91425" tIns="91425" rIns="91425" bIns="91425" anchor="t" anchorCtr="0">
             <a:normAutofit fontScale="85000" lnSpcReduction="20000"/>
           </a:bodyPr>
           <a:lstStyle/>
           <a:p>
-            <a:pPr indent="0" lvl="0" marL="0" rtl="0" algn="ctr">
+            <a:pPr marL="0" lvl="0" indent="0" algn="ctr" rtl="0">
               <a:spcBef>
                 <a:spcPts val="0"/>
               </a:spcBef>
@@ -5793,9 +5933,9 @@
                   <a:schemeClr val="lt1"/>
                 </a:solidFill>
               </a:rPr>
-              <a:t>Triad Activities is a local activity and booking platform designed for the piedmont Triad Area. </a:t>
+              <a:t>Triad Activities is a local activity and booking platform designed for the Piedmont Triad Area. </a:t>
             </a:r>
-            <a:endParaRPr>
+            <a:endParaRPr dirty="0">
               <a:solidFill>
                 <a:schemeClr val="lt1"/>
               </a:solidFill>
@@ -5806,9 +5946,11 @@
       <p:sp>
         <p:nvSpPr>
           <p:cNvPr id="56" name="Google Shape;56;p13"/>
-          <p:cNvSpPr txBox="1"/>
+          <p:cNvSpPr txBox="1">
+            <a:spLocks noGrp="1"/>
+          </p:cNvSpPr>
           <p:nvPr>
-            <p:ph idx="1" type="subTitle"/>
+            <p:ph type="subTitle" idx="1"/>
           </p:nvPr>
         </p:nvSpPr>
         <p:spPr>
@@ -5821,12 +5963,12 @@
           </a:prstGeom>
         </p:spPr>
         <p:txBody>
-          <a:bodyPr anchorCtr="0" anchor="t" bIns="91425" lIns="91425" spcFirstLastPara="1" rIns="91425" wrap="square" tIns="91425">
+          <a:bodyPr spcFirstLastPara="1" wrap="square" lIns="91425" tIns="91425" rIns="91425" bIns="91425" anchor="t" anchorCtr="0">
             <a:normAutofit fontScale="77500"/>
           </a:bodyPr>
           <a:lstStyle/>
           <a:p>
-            <a:pPr indent="0" lvl="0" marL="0" rtl="0" algn="ctr">
+            <a:pPr marL="0" lvl="0" indent="0" algn="ctr" rtl="0">
               <a:spcBef>
                 <a:spcPts val="0"/>
               </a:spcBef>
@@ -5841,15 +5983,7 @@
                   <a:schemeClr val="lt1"/>
                 </a:solidFill>
               </a:rPr>
-              <a:t>Our goal is to create an easy user friendly platform where users can discover and book local </a:t>
-            </a:r>
-            <a:r>
-              <a:rPr lang="en">
-                <a:solidFill>
-                  <a:schemeClr val="lt1"/>
-                </a:solidFill>
-              </a:rPr>
-              <a:t>activities.</a:t>
+              <a:t>Our goal is to create an easy user friendly platform where users can discover and book local activities.</a:t>
             </a:r>
             <a:endParaRPr>
               <a:solidFill>
@@ -5868,7 +6002,7 @@
 </file>
 
 <file path=ppt/slides/slide2.xml><?xml version="1.0" encoding="utf-8"?>
-<p:sld xmlns:a="http://schemas.openxmlformats.org/drawingml/2006/main" xmlns:r="http://schemas.openxmlformats.org/officeDocument/2006/relationships" xmlns:mc="http://schemas.openxmlformats.org/markup-compatibility/2006" xmlns:mv="urn:schemas-microsoft-com:mac:vml" xmlns:p="http://schemas.openxmlformats.org/presentationml/2006/main" xmlns:c="http://schemas.openxmlformats.org/drawingml/2006/chart" xmlns:dgm="http://schemas.openxmlformats.org/drawingml/2006/diagram" xmlns:o="urn:schemas-microsoft-com:office:office" xmlns:v="urn:schemas-microsoft-com:vml" xmlns:pvml="urn:schemas-microsoft-com:office:powerpoint" xmlns:com="http://schemas.openxmlformats.org/drawingml/2006/compatibility" xmlns:p14="http://schemas.microsoft.com/office/powerpoint/2010/main" xmlns:p15="http://schemas.microsoft.com/office/powerpoint/2012/main" xmlns:ahyp="http://schemas.microsoft.com/office/drawing/2018/hyperlinkcolor">
+<p:sld xmlns:a="http://schemas.openxmlformats.org/drawingml/2006/main" xmlns:r="http://schemas.openxmlformats.org/officeDocument/2006/relationships" xmlns:p="http://schemas.openxmlformats.org/presentationml/2006/main">
   <p:cSld>
     <p:bg>
       <p:bgPr>
@@ -5883,11 +6017,12 @@
           </a:gsLst>
           <a:lin ang="5400012" scaled="0"/>
         </a:gradFill>
+        <a:effectLst/>
       </p:bgPr>
     </p:bg>
     <p:spTree>
       <p:nvGrpSpPr>
-        <p:cNvPr id="60" name="Shape 60"/>
+        <p:cNvPr id="1" name="Shape 60"/>
         <p:cNvGrpSpPr/>
         <p:nvPr/>
       </p:nvGrpSpPr>
@@ -5902,7 +6037,9 @@
       <p:sp>
         <p:nvSpPr>
           <p:cNvPr id="61" name="Google Shape;61;p14"/>
-          <p:cNvSpPr txBox="1"/>
+          <p:cNvSpPr txBox="1">
+            <a:spLocks noGrp="1"/>
+          </p:cNvSpPr>
           <p:nvPr>
             <p:ph type="title"/>
           </p:nvPr>
@@ -5917,12 +6054,12 @@
           </a:prstGeom>
         </p:spPr>
         <p:txBody>
-          <a:bodyPr anchorCtr="0" anchor="ctr" bIns="91425" lIns="91425" spcFirstLastPara="1" rIns="91425" wrap="square" tIns="91425">
+          <a:bodyPr spcFirstLastPara="1" wrap="square" lIns="91425" tIns="91425" rIns="91425" bIns="91425" anchor="ctr" anchorCtr="0">
             <a:noAutofit/>
           </a:bodyPr>
           <a:lstStyle/>
           <a:p>
-            <a:pPr indent="0" lvl="0" marL="0" rtl="0" algn="ctr">
+            <a:pPr marL="0" lvl="0" indent="0" algn="ctr" rtl="0">
               <a:spcBef>
                 <a:spcPts val="0"/>
               </a:spcBef>
@@ -5959,9 +6096,11 @@
       <p:sp>
         <p:nvSpPr>
           <p:cNvPr id="62" name="Google Shape;62;p14"/>
-          <p:cNvSpPr txBox="1"/>
+          <p:cNvSpPr txBox="1">
+            <a:spLocks noGrp="1"/>
+          </p:cNvSpPr>
           <p:nvPr>
-            <p:ph idx="1" type="body"/>
+            <p:ph type="body" idx="1"/>
           </p:nvPr>
         </p:nvSpPr>
         <p:spPr>
@@ -5977,12 +6116,12 @@
           </a:ln>
         </p:spPr>
         <p:txBody>
-          <a:bodyPr anchorCtr="0" anchor="t" bIns="91425" lIns="91425" spcFirstLastPara="1" rIns="91425" wrap="square" tIns="91425">
+          <a:bodyPr spcFirstLastPara="1" wrap="square" lIns="91425" tIns="91425" rIns="91425" bIns="91425" anchor="t" anchorCtr="0">
             <a:noAutofit/>
           </a:bodyPr>
           <a:lstStyle/>
           <a:p>
-            <a:pPr indent="0" lvl="0" marL="0" rtl="0" algn="l">
+            <a:pPr marL="0" lvl="0" indent="0" algn="l" rtl="0">
               <a:spcBef>
                 <a:spcPts val="0"/>
               </a:spcBef>
@@ -6014,7 +6153,7 @@
             </a:endParaRPr>
           </a:p>
           <a:p>
-            <a:pPr indent="-361950" lvl="0" marL="457200" rtl="0" algn="l">
+            <a:pPr marL="457200" lvl="0" indent="-361950" algn="l" rtl="0">
               <a:spcBef>
                 <a:spcPts val="1200"/>
               </a:spcBef>
@@ -6051,7 +6190,7 @@
             </a:endParaRPr>
           </a:p>
           <a:p>
-            <a:pPr indent="0" lvl="0" marL="0" rtl="0" algn="l">
+            <a:pPr marL="0" lvl="0" indent="0" algn="l" rtl="0">
               <a:spcBef>
                 <a:spcPts val="1200"/>
               </a:spcBef>
@@ -6083,7 +6222,7 @@
             </a:endParaRPr>
           </a:p>
           <a:p>
-            <a:pPr indent="-361950" lvl="0" marL="457200" rtl="0" algn="l">
+            <a:pPr marL="457200" lvl="0" indent="-361950" algn="l" rtl="0">
               <a:spcBef>
                 <a:spcPts val="1200"/>
               </a:spcBef>
@@ -6120,7 +6259,7 @@
             </a:endParaRPr>
           </a:p>
           <a:p>
-            <a:pPr indent="-361950" lvl="0" marL="457200" rtl="0" algn="l">
+            <a:pPr marL="457200" lvl="0" indent="-361950" algn="l" rtl="0">
               <a:spcBef>
                 <a:spcPts val="0"/>
               </a:spcBef>
@@ -6144,31 +6283,7 @@
                 <a:cs typeface="Times New Roman"/>
                 <a:sym typeface="Times New Roman"/>
               </a:rPr>
-              <a:t>Booking is added to My Plans after </a:t>
-            </a:r>
-            <a:r>
-              <a:rPr lang="en" sz="2100">
-                <a:solidFill>
-                  <a:srgbClr val="FFFFFF"/>
-                </a:solidFill>
-                <a:latin typeface="Times New Roman"/>
-                <a:ea typeface="Times New Roman"/>
-                <a:cs typeface="Times New Roman"/>
-                <a:sym typeface="Times New Roman"/>
-              </a:rPr>
-              <a:t>confirmation</a:t>
-            </a:r>
-            <a:r>
-              <a:rPr lang="en" sz="2100">
-                <a:solidFill>
-                  <a:srgbClr val="FFFFFF"/>
-                </a:solidFill>
-                <a:latin typeface="Times New Roman"/>
-                <a:ea typeface="Times New Roman"/>
-                <a:cs typeface="Times New Roman"/>
-                <a:sym typeface="Times New Roman"/>
-              </a:rPr>
-              <a:t> </a:t>
+              <a:t>Booking is added to My Plans after confirmation </a:t>
             </a:r>
             <a:endParaRPr sz="2100">
               <a:solidFill>
@@ -6181,7 +6296,7 @@
             </a:endParaRPr>
           </a:p>
           <a:p>
-            <a:pPr indent="0" lvl="0" marL="0" rtl="0" algn="l">
+            <a:pPr marL="0" lvl="0" indent="0" algn="l" rtl="0">
               <a:spcBef>
                 <a:spcPts val="1200"/>
               </a:spcBef>
@@ -6213,7 +6328,7 @@
             </a:endParaRPr>
           </a:p>
           <a:p>
-            <a:pPr indent="-361950" lvl="0" marL="457200" rtl="0" algn="l">
+            <a:pPr marL="457200" lvl="0" indent="-361950" algn="l" rtl="0">
               <a:spcBef>
                 <a:spcPts val="1200"/>
               </a:spcBef>
@@ -6260,7 +6375,7 @@
 </file>
 
 <file path=ppt/slides/slide3.xml><?xml version="1.0" encoding="utf-8"?>
-<p:sld xmlns:a="http://schemas.openxmlformats.org/drawingml/2006/main" xmlns:r="http://schemas.openxmlformats.org/officeDocument/2006/relationships" xmlns:mc="http://schemas.openxmlformats.org/markup-compatibility/2006" xmlns:mv="urn:schemas-microsoft-com:mac:vml" xmlns:p="http://schemas.openxmlformats.org/presentationml/2006/main" xmlns:c="http://schemas.openxmlformats.org/drawingml/2006/chart" xmlns:dgm="http://schemas.openxmlformats.org/drawingml/2006/diagram" xmlns:o="urn:schemas-microsoft-com:office:office" xmlns:v="urn:schemas-microsoft-com:vml" xmlns:pvml="urn:schemas-microsoft-com:office:powerpoint" xmlns:com="http://schemas.openxmlformats.org/drawingml/2006/compatibility" xmlns:p14="http://schemas.microsoft.com/office/powerpoint/2010/main" xmlns:p15="http://schemas.microsoft.com/office/powerpoint/2012/main" xmlns:ahyp="http://schemas.microsoft.com/office/drawing/2018/hyperlinkcolor">
+<p:sld xmlns:a="http://schemas.openxmlformats.org/drawingml/2006/main" xmlns:r="http://schemas.openxmlformats.org/officeDocument/2006/relationships" xmlns:p="http://schemas.openxmlformats.org/presentationml/2006/main">
   <p:cSld>
     <p:bg>
       <p:bgPr>
@@ -6275,11 +6390,12 @@
           </a:gsLst>
           <a:lin ang="5400012" scaled="0"/>
         </a:gradFill>
+        <a:effectLst/>
       </p:bgPr>
     </p:bg>
     <p:spTree>
       <p:nvGrpSpPr>
-        <p:cNvPr id="66" name="Shape 66"/>
+        <p:cNvPr id="1" name="Shape 66"/>
         <p:cNvGrpSpPr/>
         <p:nvPr/>
       </p:nvGrpSpPr>
@@ -6294,7 +6410,9 @@
       <p:sp>
         <p:nvSpPr>
           <p:cNvPr id="67" name="Google Shape;67;p15"/>
-          <p:cNvSpPr txBox="1"/>
+          <p:cNvSpPr txBox="1">
+            <a:spLocks noGrp="1"/>
+          </p:cNvSpPr>
           <p:nvPr>
             <p:ph type="title"/>
           </p:nvPr>
@@ -6309,12 +6427,12 @@
           </a:prstGeom>
         </p:spPr>
         <p:txBody>
-          <a:bodyPr anchorCtr="0" anchor="t" bIns="91425" lIns="91425" spcFirstLastPara="1" rIns="91425" wrap="square" tIns="91425">
+          <a:bodyPr spcFirstLastPara="1" wrap="square" lIns="91425" tIns="91425" rIns="91425" bIns="91425" anchor="t" anchorCtr="0">
             <a:normAutofit fontScale="90000"/>
           </a:bodyPr>
           <a:lstStyle/>
           <a:p>
-            <a:pPr indent="0" lvl="0" marL="0" rtl="0" algn="ctr">
+            <a:pPr marL="0" lvl="0" indent="0" algn="ctr" rtl="0">
               <a:spcBef>
                 <a:spcPts val="0"/>
               </a:spcBef>
@@ -6350,9 +6468,11 @@
       <p:sp>
         <p:nvSpPr>
           <p:cNvPr id="68" name="Google Shape;68;p15"/>
-          <p:cNvSpPr txBox="1"/>
+          <p:cNvSpPr txBox="1">
+            <a:spLocks noGrp="1"/>
+          </p:cNvSpPr>
           <p:nvPr>
-            <p:ph idx="1" type="body"/>
+            <p:ph type="body" idx="1"/>
           </p:nvPr>
         </p:nvSpPr>
         <p:spPr>
@@ -6365,12 +6485,12 @@
           </a:prstGeom>
         </p:spPr>
         <p:txBody>
-          <a:bodyPr anchorCtr="0" anchor="t" bIns="91425" lIns="91425" spcFirstLastPara="1" rIns="91425" wrap="square" tIns="91425">
+          <a:bodyPr spcFirstLastPara="1" wrap="square" lIns="91425" tIns="91425" rIns="91425" bIns="91425" anchor="t" anchorCtr="0">
             <a:normAutofit/>
           </a:bodyPr>
           <a:lstStyle/>
           <a:p>
-            <a:pPr indent="0" lvl="0" marL="0" rtl="0" algn="l">
+            <a:pPr marL="0" lvl="0" indent="0" algn="l" rtl="0">
               <a:spcBef>
                 <a:spcPts val="0"/>
               </a:spcBef>
@@ -6402,7 +6522,7 @@
             </a:endParaRPr>
           </a:p>
           <a:p>
-            <a:pPr indent="0" lvl="0" marL="0" rtl="0" algn="l">
+            <a:pPr marL="0" lvl="0" indent="0" algn="l" rtl="0">
               <a:spcBef>
                 <a:spcPts val="1200"/>
               </a:spcBef>
@@ -6434,7 +6554,7 @@
             </a:endParaRPr>
           </a:p>
           <a:p>
-            <a:pPr indent="0" lvl="0" marL="0" rtl="0" algn="l">
+            <a:pPr marL="0" lvl="0" indent="0" algn="l" rtl="0">
               <a:spcBef>
                 <a:spcPts val="1200"/>
               </a:spcBef>
@@ -6466,7 +6586,7 @@
             </a:endParaRPr>
           </a:p>
           <a:p>
-            <a:pPr indent="0" lvl="0" marL="0" rtl="0" algn="l">
+            <a:pPr marL="0" lvl="0" indent="0" algn="l" rtl="0">
               <a:spcBef>
                 <a:spcPts val="1200"/>
               </a:spcBef>
@@ -6508,7 +6628,288 @@
 </file>
 
 <file path=ppt/theme/theme1.xml><?xml version="1.0" encoding="utf-8"?>
-<a:theme xmlns:a="http://schemas.openxmlformats.org/drawingml/2006/main" xmlns:r="http://schemas.openxmlformats.org/officeDocument/2006/relationships">
+<a:theme xmlns:a="http://schemas.openxmlformats.org/drawingml/2006/main" name="Simple Light">
+  <a:themeElements>
+    <a:clrScheme name="Simple Light">
+      <a:dk1>
+        <a:srgbClr val="000000"/>
+      </a:dk1>
+      <a:lt1>
+        <a:srgbClr val="FFFFFF"/>
+      </a:lt1>
+      <a:dk2>
+        <a:srgbClr val="595959"/>
+      </a:dk2>
+      <a:lt2>
+        <a:srgbClr val="EEEEEE"/>
+      </a:lt2>
+      <a:accent1>
+        <a:srgbClr val="4285F4"/>
+      </a:accent1>
+      <a:accent2>
+        <a:srgbClr val="212121"/>
+      </a:accent2>
+      <a:accent3>
+        <a:srgbClr val="78909C"/>
+      </a:accent3>
+      <a:accent4>
+        <a:srgbClr val="FFAB40"/>
+      </a:accent4>
+      <a:accent5>
+        <a:srgbClr val="0097A7"/>
+      </a:accent5>
+      <a:accent6>
+        <a:srgbClr val="EEFF41"/>
+      </a:accent6>
+      <a:hlink>
+        <a:srgbClr val="0097A7"/>
+      </a:hlink>
+      <a:folHlink>
+        <a:srgbClr val="0097A7"/>
+      </a:folHlink>
+    </a:clrScheme>
+    <a:fontScheme name="Office">
+      <a:majorFont>
+        <a:latin typeface="Arial"/>
+        <a:ea typeface=""/>
+        <a:cs typeface=""/>
+        <a:font script="Jpan" typeface="ＭＳ Ｐゴシック"/>
+        <a:font script="Hang" typeface="맑은 고딕"/>
+        <a:font script="Hans" typeface="宋体"/>
+        <a:font script="Hant" typeface="新細明體"/>
+        <a:font script="Arab" typeface="Times New Roman"/>
+        <a:font script="Hebr" typeface="Times New Roman"/>
+        <a:font script="Thai" typeface="Angsana New"/>
+        <a:font script="Ethi" typeface="Nyala"/>
+        <a:font script="Beng" typeface="Vrinda"/>
+        <a:font script="Gujr" typeface="Shruti"/>
+        <a:font script="Khmr" typeface="MoolBoran"/>
+        <a:font script="Knda" typeface="Tunga"/>
+        <a:font script="Guru" typeface="Raavi"/>
+        <a:font script="Cans" typeface="Euphemia"/>
+        <a:font script="Cher" typeface="Plantagenet Cherokee"/>
+        <a:font script="Yiii" typeface="Microsoft Yi Baiti"/>
+        <a:font script="Tibt" typeface="Microsoft Himalaya"/>
+        <a:font script="Thaa" typeface="MV Boli"/>
+        <a:font script="Deva" typeface="Mangal"/>
+        <a:font script="Telu" typeface="Gautami"/>
+        <a:font script="Taml" typeface="Latha"/>
+        <a:font script="Syrc" typeface="Estrangelo Edessa"/>
+        <a:font script="Orya" typeface="Kalinga"/>
+        <a:font script="Mlym" typeface="Kartika"/>
+        <a:font script="Laoo" typeface="DokChampa"/>
+        <a:font script="Sinh" typeface="Iskoola Pota"/>
+        <a:font script="Mong" typeface="Mongolian Baiti"/>
+        <a:font script="Viet" typeface="Times New Roman"/>
+        <a:font script="Uigh" typeface="Microsoft Uighur"/>
+        <a:font script="Geor" typeface="Sylfaen"/>
+      </a:majorFont>
+      <a:minorFont>
+        <a:latin typeface="Arial"/>
+        <a:ea typeface=""/>
+        <a:cs typeface=""/>
+        <a:font script="Jpan" typeface="ＭＳ Ｐゴシック"/>
+        <a:font script="Hang" typeface="맑은 고딕"/>
+        <a:font script="Hans" typeface="宋体"/>
+        <a:font script="Hant" typeface="新細明體"/>
+        <a:font script="Arab" typeface="Arial"/>
+        <a:font script="Hebr" typeface="Arial"/>
+        <a:font script="Thai" typeface="Cordia New"/>
+        <a:font script="Ethi" typeface="Nyala"/>
+        <a:font script="Beng" typeface="Vrinda"/>
+        <a:font script="Gujr" typeface="Shruti"/>
+        <a:font script="Khmr" typeface="DaunPenh"/>
+        <a:font script="Knda" typeface="Tunga"/>
+        <a:font script="Guru" typeface="Raavi"/>
+        <a:font script="Cans" typeface="Euphemia"/>
+        <a:font script="Cher" typeface="Plantagenet Cherokee"/>
+        <a:font script="Yiii" typeface="Microsoft Yi Baiti"/>
+        <a:font script="Tibt" typeface="Microsoft Himalaya"/>
+        <a:font script="Thaa" typeface="MV Boli"/>
+        <a:font script="Deva" typeface="Mangal"/>
+        <a:font script="Telu" typeface="Gautami"/>
+        <a:font script="Taml" typeface="Latha"/>
+        <a:font script="Syrc" typeface="Estrangelo Edessa"/>
+        <a:font script="Orya" typeface="Kalinga"/>
+        <a:font script="Mlym" typeface="Kartika"/>
+        <a:font script="Laoo" typeface="DokChampa"/>
+        <a:font script="Sinh" typeface="Iskoola Pota"/>
+        <a:font script="Mong" typeface="Mongolian Baiti"/>
+        <a:font script="Viet" typeface="Arial"/>
+        <a:font script="Uigh" typeface="Microsoft Uighur"/>
+        <a:font script="Geor" typeface="Sylfaen"/>
+      </a:minorFont>
+    </a:fontScheme>
+    <a:fmtScheme name="Office">
+      <a:fillStyleLst>
+        <a:solidFill>
+          <a:schemeClr val="phClr"/>
+        </a:solidFill>
+        <a:gradFill rotWithShape="1">
+          <a:gsLst>
+            <a:gs pos="0">
+              <a:schemeClr val="phClr">
+                <a:tint val="50000"/>
+                <a:satMod val="300000"/>
+              </a:schemeClr>
+            </a:gs>
+            <a:gs pos="35000">
+              <a:schemeClr val="phClr">
+                <a:tint val="37000"/>
+                <a:satMod val="300000"/>
+              </a:schemeClr>
+            </a:gs>
+            <a:gs pos="100000">
+              <a:schemeClr val="phClr">
+                <a:tint val="15000"/>
+                <a:satMod val="350000"/>
+              </a:schemeClr>
+            </a:gs>
+          </a:gsLst>
+          <a:lin ang="16200000" scaled="1"/>
+        </a:gradFill>
+        <a:gradFill rotWithShape="1">
+          <a:gsLst>
+            <a:gs pos="0">
+              <a:schemeClr val="phClr">
+                <a:tint val="100000"/>
+                <a:shade val="100000"/>
+                <a:satMod val="130000"/>
+              </a:schemeClr>
+            </a:gs>
+            <a:gs pos="100000">
+              <a:schemeClr val="phClr">
+                <a:tint val="50000"/>
+                <a:shade val="100000"/>
+                <a:satMod val="350000"/>
+              </a:schemeClr>
+            </a:gs>
+          </a:gsLst>
+          <a:lin ang="16200000" scaled="0"/>
+        </a:gradFill>
+      </a:fillStyleLst>
+      <a:lnStyleLst>
+        <a:ln w="9525" cap="flat" cmpd="sng" algn="ctr">
+          <a:solidFill>
+            <a:schemeClr val="phClr">
+              <a:shade val="95000"/>
+              <a:satMod val="105000"/>
+            </a:schemeClr>
+          </a:solidFill>
+          <a:prstDash val="solid"/>
+        </a:ln>
+        <a:ln w="25400" cap="flat" cmpd="sng" algn="ctr">
+          <a:solidFill>
+            <a:schemeClr val="phClr"/>
+          </a:solidFill>
+          <a:prstDash val="solid"/>
+        </a:ln>
+        <a:ln w="38100" cap="flat" cmpd="sng" algn="ctr">
+          <a:solidFill>
+            <a:schemeClr val="phClr"/>
+          </a:solidFill>
+          <a:prstDash val="solid"/>
+        </a:ln>
+      </a:lnStyleLst>
+      <a:effectStyleLst>
+        <a:effectStyle>
+          <a:effectLst>
+            <a:outerShdw blurRad="40000" dist="20000" dir="5400000" rotWithShape="0">
+              <a:srgbClr val="000000">
+                <a:alpha val="38000"/>
+              </a:srgbClr>
+            </a:outerShdw>
+          </a:effectLst>
+        </a:effectStyle>
+        <a:effectStyle>
+          <a:effectLst>
+            <a:outerShdw blurRad="40000" dist="23000" dir="5400000" rotWithShape="0">
+              <a:srgbClr val="000000">
+                <a:alpha val="35000"/>
+              </a:srgbClr>
+            </a:outerShdw>
+          </a:effectLst>
+        </a:effectStyle>
+        <a:effectStyle>
+          <a:effectLst>
+            <a:outerShdw blurRad="40000" dist="23000" dir="5400000" rotWithShape="0">
+              <a:srgbClr val="000000">
+                <a:alpha val="35000"/>
+              </a:srgbClr>
+            </a:outerShdw>
+          </a:effectLst>
+          <a:scene3d>
+            <a:camera prst="orthographicFront">
+              <a:rot lat="0" lon="0" rev="0"/>
+            </a:camera>
+            <a:lightRig rig="threePt" dir="t">
+              <a:rot lat="0" lon="0" rev="1200000"/>
+            </a:lightRig>
+          </a:scene3d>
+          <a:sp3d>
+            <a:bevelT w="63500" h="25400"/>
+          </a:sp3d>
+        </a:effectStyle>
+      </a:effectStyleLst>
+      <a:bgFillStyleLst>
+        <a:solidFill>
+          <a:schemeClr val="phClr"/>
+        </a:solidFill>
+        <a:gradFill rotWithShape="1">
+          <a:gsLst>
+            <a:gs pos="0">
+              <a:schemeClr val="phClr">
+                <a:tint val="40000"/>
+                <a:satMod val="350000"/>
+              </a:schemeClr>
+            </a:gs>
+            <a:gs pos="40000">
+              <a:schemeClr val="phClr">
+                <a:tint val="45000"/>
+                <a:shade val="99000"/>
+                <a:satMod val="350000"/>
+              </a:schemeClr>
+            </a:gs>
+            <a:gs pos="100000">
+              <a:schemeClr val="phClr">
+                <a:shade val="20000"/>
+                <a:satMod val="255000"/>
+              </a:schemeClr>
+            </a:gs>
+          </a:gsLst>
+          <a:path path="circle">
+            <a:fillToRect l="50000" t="-80000" r="50000" b="180000"/>
+          </a:path>
+        </a:gradFill>
+        <a:gradFill rotWithShape="1">
+          <a:gsLst>
+            <a:gs pos="0">
+              <a:schemeClr val="phClr">
+                <a:tint val="80000"/>
+                <a:satMod val="300000"/>
+              </a:schemeClr>
+            </a:gs>
+            <a:gs pos="100000">
+              <a:schemeClr val="phClr">
+                <a:shade val="30000"/>
+                <a:satMod val="200000"/>
+              </a:schemeClr>
+            </a:gs>
+          </a:gsLst>
+          <a:path path="circle">
+            <a:fillToRect l="50000" t="50000" r="50000" b="50000"/>
+          </a:path>
+        </a:gradFill>
+      </a:bgFillStyleLst>
+    </a:fmtScheme>
+  </a:themeElements>
+  <a:objectDefaults/>
+  <a:extraClrSchemeLst/>
+</a:theme>
+</file>
+
+<file path=ppt/theme/theme2.xml><?xml version="1.0" encoding="utf-8"?>
+<a:theme xmlns:a="http://schemas.openxmlformats.org/drawingml/2006/main">
   <a:themeElements>
     <a:clrScheme name="Default">
       <a:dk1>
@@ -6783,284 +7184,13 @@
       </a:bgFillStyleLst>
     </a:fmtScheme>
   </a:themeElements>
+  <a:objectDefaults/>
+  <a:extraClrSchemeLst/>
 </a:theme>
 </file>
 
-<file path=ppt/theme/theme2.xml><?xml version="1.0" encoding="utf-8"?>
-<a:theme xmlns:a="http://schemas.openxmlformats.org/drawingml/2006/main" xmlns:r="http://schemas.openxmlformats.org/officeDocument/2006/relationships" name="Simple Light">
-  <a:themeElements>
-    <a:clrScheme name="Simple Light">
-      <a:dk1>
-        <a:srgbClr val="000000"/>
-      </a:dk1>
-      <a:lt1>
-        <a:srgbClr val="FFFFFF"/>
-      </a:lt1>
-      <a:dk2>
-        <a:srgbClr val="595959"/>
-      </a:dk2>
-      <a:lt2>
-        <a:srgbClr val="EEEEEE"/>
-      </a:lt2>
-      <a:accent1>
-        <a:srgbClr val="4285F4"/>
-      </a:accent1>
-      <a:accent2>
-        <a:srgbClr val="212121"/>
-      </a:accent2>
-      <a:accent3>
-        <a:srgbClr val="78909C"/>
-      </a:accent3>
-      <a:accent4>
-        <a:srgbClr val="FFAB40"/>
-      </a:accent4>
-      <a:accent5>
-        <a:srgbClr val="0097A7"/>
-      </a:accent5>
-      <a:accent6>
-        <a:srgbClr val="EEFF41"/>
-      </a:accent6>
-      <a:hlink>
-        <a:srgbClr val="0097A7"/>
-      </a:hlink>
-      <a:folHlink>
-        <a:srgbClr val="0097A7"/>
-      </a:folHlink>
-    </a:clrScheme>
-    <a:fontScheme name="Office">
-      <a:majorFont>
-        <a:latin typeface="Arial"/>
-        <a:ea typeface=""/>
-        <a:cs typeface=""/>
-        <a:font script="Jpan" typeface="ＭＳ Ｐゴシック"/>
-        <a:font script="Hang" typeface="맑은 고딕"/>
-        <a:font script="Hans" typeface="宋体"/>
-        <a:font script="Hant" typeface="新細明體"/>
-        <a:font script="Arab" typeface="Times New Roman"/>
-        <a:font script="Hebr" typeface="Times New Roman"/>
-        <a:font script="Thai" typeface="Angsana New"/>
-        <a:font script="Ethi" typeface="Nyala"/>
-        <a:font script="Beng" typeface="Vrinda"/>
-        <a:font script="Gujr" typeface="Shruti"/>
-        <a:font script="Khmr" typeface="MoolBoran"/>
-        <a:font script="Knda" typeface="Tunga"/>
-        <a:font script="Guru" typeface="Raavi"/>
-        <a:font script="Cans" typeface="Euphemia"/>
-        <a:font script="Cher" typeface="Plantagenet Cherokee"/>
-        <a:font script="Yiii" typeface="Microsoft Yi Baiti"/>
-        <a:font script="Tibt" typeface="Microsoft Himalaya"/>
-        <a:font script="Thaa" typeface="MV Boli"/>
-        <a:font script="Deva" typeface="Mangal"/>
-        <a:font script="Telu" typeface="Gautami"/>
-        <a:font script="Taml" typeface="Latha"/>
-        <a:font script="Syrc" typeface="Estrangelo Edessa"/>
-        <a:font script="Orya" typeface="Kalinga"/>
-        <a:font script="Mlym" typeface="Kartika"/>
-        <a:font script="Laoo" typeface="DokChampa"/>
-        <a:font script="Sinh" typeface="Iskoola Pota"/>
-        <a:font script="Mong" typeface="Mongolian Baiti"/>
-        <a:font script="Viet" typeface="Times New Roman"/>
-        <a:font script="Uigh" typeface="Microsoft Uighur"/>
-        <a:font script="Geor" typeface="Sylfaen"/>
-      </a:majorFont>
-      <a:minorFont>
-        <a:latin typeface="Arial"/>
-        <a:ea typeface=""/>
-        <a:cs typeface=""/>
-        <a:font script="Jpan" typeface="ＭＳ Ｐゴシック"/>
-        <a:font script="Hang" typeface="맑은 고딕"/>
-        <a:font script="Hans" typeface="宋体"/>
-        <a:font script="Hant" typeface="新細明體"/>
-        <a:font script="Arab" typeface="Arial"/>
-        <a:font script="Hebr" typeface="Arial"/>
-        <a:font script="Thai" typeface="Cordia New"/>
-        <a:font script="Ethi" typeface="Nyala"/>
-        <a:font script="Beng" typeface="Vrinda"/>
-        <a:font script="Gujr" typeface="Shruti"/>
-        <a:font script="Khmr" typeface="DaunPenh"/>
-        <a:font script="Knda" typeface="Tunga"/>
-        <a:font script="Guru" typeface="Raavi"/>
-        <a:font script="Cans" typeface="Euphemia"/>
-        <a:font script="Cher" typeface="Plantagenet Cherokee"/>
-        <a:font script="Yiii" typeface="Microsoft Yi Baiti"/>
-        <a:font script="Tibt" typeface="Microsoft Himalaya"/>
-        <a:font script="Thaa" typeface="MV Boli"/>
-        <a:font script="Deva" typeface="Mangal"/>
-        <a:font script="Telu" typeface="Gautami"/>
-        <a:font script="Taml" typeface="Latha"/>
-        <a:font script="Syrc" typeface="Estrangelo Edessa"/>
-        <a:font script="Orya" typeface="Kalinga"/>
-        <a:font script="Mlym" typeface="Kartika"/>
-        <a:font script="Laoo" typeface="DokChampa"/>
-        <a:font script="Sinh" typeface="Iskoola Pota"/>
-        <a:font script="Mong" typeface="Mongolian Baiti"/>
-        <a:font script="Viet" typeface="Arial"/>
-        <a:font script="Uigh" typeface="Microsoft Uighur"/>
-        <a:font script="Geor" typeface="Sylfaen"/>
-      </a:minorFont>
-    </a:fontScheme>
-    <a:fmtScheme name="Office">
-      <a:fillStyleLst>
-        <a:solidFill>
-          <a:schemeClr val="phClr"/>
-        </a:solidFill>
-        <a:gradFill rotWithShape="1">
-          <a:gsLst>
-            <a:gs pos="0">
-              <a:schemeClr val="phClr">
-                <a:tint val="50000"/>
-                <a:satMod val="300000"/>
-              </a:schemeClr>
-            </a:gs>
-            <a:gs pos="35000">
-              <a:schemeClr val="phClr">
-                <a:tint val="37000"/>
-                <a:satMod val="300000"/>
-              </a:schemeClr>
-            </a:gs>
-            <a:gs pos="100000">
-              <a:schemeClr val="phClr">
-                <a:tint val="15000"/>
-                <a:satMod val="350000"/>
-              </a:schemeClr>
-            </a:gs>
-          </a:gsLst>
-          <a:lin ang="16200000" scaled="1"/>
-        </a:gradFill>
-        <a:gradFill rotWithShape="1">
-          <a:gsLst>
-            <a:gs pos="0">
-              <a:schemeClr val="phClr">
-                <a:tint val="100000"/>
-                <a:shade val="100000"/>
-                <a:satMod val="130000"/>
-              </a:schemeClr>
-            </a:gs>
-            <a:gs pos="100000">
-              <a:schemeClr val="phClr">
-                <a:tint val="50000"/>
-                <a:shade val="100000"/>
-                <a:satMod val="350000"/>
-              </a:schemeClr>
-            </a:gs>
-          </a:gsLst>
-          <a:lin ang="16200000" scaled="0"/>
-        </a:gradFill>
-      </a:fillStyleLst>
-      <a:lnStyleLst>
-        <a:ln w="9525" cap="flat" cmpd="sng" algn="ctr">
-          <a:solidFill>
-            <a:schemeClr val="phClr">
-              <a:shade val="95000"/>
-              <a:satMod val="105000"/>
-            </a:schemeClr>
-          </a:solidFill>
-          <a:prstDash val="solid"/>
-        </a:ln>
-        <a:ln w="25400" cap="flat" cmpd="sng" algn="ctr">
-          <a:solidFill>
-            <a:schemeClr val="phClr"/>
-          </a:solidFill>
-          <a:prstDash val="solid"/>
-        </a:ln>
-        <a:ln w="38100" cap="flat" cmpd="sng" algn="ctr">
-          <a:solidFill>
-            <a:schemeClr val="phClr"/>
-          </a:solidFill>
-          <a:prstDash val="solid"/>
-        </a:ln>
-      </a:lnStyleLst>
-      <a:effectStyleLst>
-        <a:effectStyle>
-          <a:effectLst>
-            <a:outerShdw blurRad="40000" dist="20000" dir="5400000" rotWithShape="0">
-              <a:srgbClr val="000000">
-                <a:alpha val="38000"/>
-              </a:srgbClr>
-            </a:outerShdw>
-          </a:effectLst>
-        </a:effectStyle>
-        <a:effectStyle>
-          <a:effectLst>
-            <a:outerShdw blurRad="40000" dist="23000" dir="5400000" rotWithShape="0">
-              <a:srgbClr val="000000">
-                <a:alpha val="35000"/>
-              </a:srgbClr>
-            </a:outerShdw>
-          </a:effectLst>
-        </a:effectStyle>
-        <a:effectStyle>
-          <a:effectLst>
-            <a:outerShdw blurRad="40000" dist="23000" dir="5400000" rotWithShape="0">
-              <a:srgbClr val="000000">
-                <a:alpha val="35000"/>
-              </a:srgbClr>
-            </a:outerShdw>
-          </a:effectLst>
-          <a:scene3d>
-            <a:camera prst="orthographicFront">
-              <a:rot lat="0" lon="0" rev="0"/>
-            </a:camera>
-            <a:lightRig rig="threePt" dir="t">
-              <a:rot lat="0" lon="0" rev="1200000"/>
-            </a:lightRig>
-          </a:scene3d>
-          <a:sp3d>
-            <a:bevelT w="63500" h="25400"/>
-          </a:sp3d>
-        </a:effectStyle>
-      </a:effectStyleLst>
-      <a:bgFillStyleLst>
-        <a:solidFill>
-          <a:schemeClr val="phClr"/>
-        </a:solidFill>
-        <a:gradFill rotWithShape="1">
-          <a:gsLst>
-            <a:gs pos="0">
-              <a:schemeClr val="phClr">
-                <a:tint val="40000"/>
-                <a:satMod val="350000"/>
-              </a:schemeClr>
-            </a:gs>
-            <a:gs pos="40000">
-              <a:schemeClr val="phClr">
-                <a:tint val="45000"/>
-                <a:shade val="99000"/>
-                <a:satMod val="350000"/>
-              </a:schemeClr>
-            </a:gs>
-            <a:gs pos="100000">
-              <a:schemeClr val="phClr">
-                <a:shade val="20000"/>
-                <a:satMod val="255000"/>
-              </a:schemeClr>
-            </a:gs>
-          </a:gsLst>
-          <a:path path="circle">
-            <a:fillToRect l="50000" t="-80000" r="50000" b="180000"/>
-          </a:path>
-        </a:gradFill>
-        <a:gradFill rotWithShape="1">
-          <a:gsLst>
-            <a:gs pos="0">
-              <a:schemeClr val="phClr">
-                <a:tint val="80000"/>
-                <a:satMod val="300000"/>
-              </a:schemeClr>
-            </a:gs>
-            <a:gs pos="100000">
-              <a:schemeClr val="phClr">
-                <a:shade val="30000"/>
-                <a:satMod val="200000"/>
-              </a:schemeClr>
-            </a:gs>
-          </a:gsLst>
-          <a:path path="circle">
-            <a:fillToRect l="50000" t="50000" r="50000" b="50000"/>
-          </a:path>
-        </a:gradFill>
-      </a:bgFillStyleLst>
-    </a:fmtScheme>
-  </a:themeElements>
-</a:theme>
+<file path=docMetadata/LabelInfo.xml><?xml version="1.0" encoding="utf-8"?>
+<clbl:labelList xmlns:clbl="http://schemas.microsoft.com/office/2020/mipLabelMetadata">
+  <clbl:label id="{a2761ec8-7198-4440-bea0-e9dd2af28b51}" enabled="1" method="Standard" siteId="{73e15cf5-5dbb-46af-a862-753916269d73}" removed="0"/>
+</clbl:labelList>
 </file>